--- a/Nuzzle_REST_API_Architecture_v2.pptx
+++ b/Nuzzle_REST_API_Architecture_v2.pptx
@@ -1730,9 +1730,9 @@
                 <a:solidFill>
                   <a:srgbClr val="7C3AED"/>
                 </a:solidFill>
-                <a:latin typeface="Plus Jakarta Sans" pitchFamily="34" charset="0"/>
-                <a:ea typeface="Plus Jakarta Sans" pitchFamily="34" charset="-122"/>
-                <a:cs typeface="Plus Jakarta Sans" pitchFamily="34" charset="-120"/>
+                <a:latin typeface="Times New Roman" pitchFamily="34" charset="0"/>
+                <a:ea typeface="Times New Roman" pitchFamily="34" charset="-122"/>
+                <a:cs typeface="Times New Roman" pitchFamily="34" charset="-120"/>
               </a:rPr>
               <a:t>🐾 NUZZLE FULL-STACK v2.0</a:t>
             </a:r>
@@ -1772,9 +1772,9 @@
                 <a:solidFill>
                   <a:srgbClr val="261E38"/>
                 </a:solidFill>
-                <a:latin typeface="Outfit" pitchFamily="34" charset="0"/>
-                <a:ea typeface="Outfit" pitchFamily="34" charset="-122"/>
-                <a:cs typeface="Outfit" pitchFamily="34" charset="-120"/>
+                <a:latin typeface="Times New Roman" pitchFamily="34" charset="0"/>
+                <a:ea typeface="Times New Roman" pitchFamily="34" charset="-122"/>
+                <a:cs typeface="Times New Roman" pitchFamily="34" charset="-120"/>
               </a:rPr>
               <a:t>RESTful API Architecture &amp;</a:t>
             </a:r>
@@ -1792,9 +1792,9 @@
                 <a:solidFill>
                   <a:srgbClr val="261E38"/>
                 </a:solidFill>
-                <a:latin typeface="Outfit" pitchFamily="34" charset="0"/>
-                <a:ea typeface="Outfit" pitchFamily="34" charset="-122"/>
-                <a:cs typeface="Outfit" pitchFamily="34" charset="-120"/>
+                <a:latin typeface="Times New Roman" pitchFamily="34" charset="0"/>
+                <a:ea typeface="Times New Roman" pitchFamily="34" charset="-122"/>
+                <a:cs typeface="Times New Roman" pitchFamily="34" charset="-120"/>
               </a:rPr>
               <a:t>Frontend-to-Backend Integration</a:t>
             </a:r>
@@ -1834,9 +1834,9 @@
                 <a:solidFill>
                   <a:srgbClr val="5F5377"/>
                 </a:solidFill>
-                <a:latin typeface="Plus Jakarta Sans" pitchFamily="34" charset="0"/>
-                <a:ea typeface="Plus Jakarta Sans" pitchFamily="34" charset="-122"/>
-                <a:cs typeface="Plus Jakarta Sans" pitchFamily="34" charset="-120"/>
+                <a:latin typeface="Times New Roman" pitchFamily="34" charset="0"/>
+                <a:ea typeface="Times New Roman" pitchFamily="34" charset="-122"/>
+                <a:cs typeface="Times New Roman" pitchFamily="34" charset="-120"/>
               </a:rPr>
               <a:t>A decoupled, production-grade cloud architecture connecting a high-performance Vue 3 Client with a Next.js 16 REST Engine, Prisma 7 ORM, and Supabase PostgreSQL with real-time authentication.</a:t>
             </a:r>
@@ -1934,9 +1934,9 @@
                 <a:solidFill>
                   <a:srgbClr val="261E38"/>
                 </a:solidFill>
-                <a:latin typeface="Outfit" pitchFamily="34" charset="0"/>
-                <a:ea typeface="Outfit" pitchFamily="34" charset="-122"/>
-                <a:cs typeface="Outfit" pitchFamily="34" charset="-120"/>
+                <a:latin typeface="Times New Roman" pitchFamily="34" charset="0"/>
+                <a:ea typeface="Times New Roman" pitchFamily="34" charset="-122"/>
+                <a:cs typeface="Times New Roman" pitchFamily="34" charset="-120"/>
               </a:rPr>
               <a:t>18+ REST Endpoints</a:t>
             </a:r>
@@ -1973,9 +1973,9 @@
                 <a:solidFill>
                   <a:srgbClr val="5F5377"/>
                 </a:solidFill>
-                <a:latin typeface="Plus Jakarta Sans" pitchFamily="34" charset="0"/>
-                <a:ea typeface="Plus Jakarta Sans" pitchFamily="34" charset="-122"/>
-                <a:cs typeface="Plus Jakarta Sans" pitchFamily="34" charset="-120"/>
+                <a:latin typeface="Times New Roman" pitchFamily="34" charset="0"/>
+                <a:ea typeface="Times New Roman" pitchFamily="34" charset="-122"/>
+                <a:cs typeface="Times New Roman" pitchFamily="34" charset="-120"/>
               </a:rPr>
               <a:t>Auth, Feed, Radar, Vets &amp; PawAI</a:t>
             </a:r>
@@ -2073,9 +2073,9 @@
                 <a:solidFill>
                   <a:srgbClr val="261E38"/>
                 </a:solidFill>
-                <a:latin typeface="Outfit" pitchFamily="34" charset="0"/>
-                <a:ea typeface="Outfit" pitchFamily="34" charset="-122"/>
-                <a:cs typeface="Outfit" pitchFamily="34" charset="-120"/>
+                <a:latin typeface="Times New Roman" pitchFamily="34" charset="0"/>
+                <a:ea typeface="Times New Roman" pitchFamily="34" charset="-122"/>
+                <a:cs typeface="Times New Roman" pitchFamily="34" charset="-120"/>
               </a:rPr>
               <a:t>Decoupled Client Layer</a:t>
             </a:r>
@@ -2112,9 +2112,9 @@
                 <a:solidFill>
                   <a:srgbClr val="5F5377"/>
                 </a:solidFill>
-                <a:latin typeface="Plus Jakarta Sans" pitchFamily="34" charset="0"/>
-                <a:ea typeface="Plus Jakarta Sans" pitchFamily="34" charset="-122"/>
-                <a:cs typeface="Plus Jakarta Sans" pitchFamily="34" charset="-120"/>
+                <a:latin typeface="Times New Roman" pitchFamily="34" charset="0"/>
+                <a:ea typeface="Times New Roman" pitchFamily="34" charset="-122"/>
+                <a:cs typeface="Times New Roman" pitchFamily="34" charset="-120"/>
               </a:rPr>
               <a:t>Typed Axios/Fetch API Services</a:t>
             </a:r>
@@ -2212,9 +2212,9 @@
                 <a:solidFill>
                   <a:srgbClr val="261E38"/>
                 </a:solidFill>
-                <a:latin typeface="Outfit" pitchFamily="34" charset="0"/>
-                <a:ea typeface="Outfit" pitchFamily="34" charset="-122"/>
-                <a:cs typeface="Outfit" pitchFamily="34" charset="-120"/>
+                <a:latin typeface="Times New Roman" pitchFamily="34" charset="0"/>
+                <a:ea typeface="Times New Roman" pitchFamily="34" charset="-122"/>
+                <a:cs typeface="Times New Roman" pitchFamily="34" charset="-120"/>
               </a:rPr>
               <a:t>PostgreSQL &amp; Supabase</a:t>
             </a:r>
@@ -2251,9 +2251,9 @@
                 <a:solidFill>
                   <a:srgbClr val="5F5377"/>
                 </a:solidFill>
-                <a:latin typeface="Plus Jakarta Sans" pitchFamily="34" charset="0"/>
-                <a:ea typeface="Plus Jakarta Sans" pitchFamily="34" charset="-122"/>
-                <a:cs typeface="Plus Jakarta Sans" pitchFamily="34" charset="-120"/>
+                <a:latin typeface="Times New Roman" pitchFamily="34" charset="0"/>
+                <a:ea typeface="Times New Roman" pitchFamily="34" charset="-122"/>
+                <a:cs typeface="Times New Roman" pitchFamily="34" charset="-120"/>
               </a:rPr>
               <a:t>Prisma 7 with Connection Pooling</a:t>
             </a:r>
@@ -2315,9 +2315,9 @@
                 <a:solidFill>
                   <a:srgbClr val="947DEE"/>
                 </a:solidFill>
-                <a:latin typeface="Plus Jakarta Sans" pitchFamily="34" charset="0"/>
-                <a:ea typeface="Plus Jakarta Sans" pitchFamily="34" charset="-122"/>
-                <a:cs typeface="Plus Jakarta Sans" pitchFamily="34" charset="-120"/>
+                <a:latin typeface="Times New Roman" pitchFamily="34" charset="0"/>
+                <a:ea typeface="Times New Roman" pitchFamily="34" charset="-122"/>
+                <a:cs typeface="Times New Roman" pitchFamily="34" charset="-120"/>
               </a:rPr>
               <a:t>CORE ARCHITECTURE STACK</a:t>
             </a:r>
@@ -2379,9 +2379,9 @@
                 <a:solidFill>
                   <a:srgbClr val="9589B0"/>
                 </a:solidFill>
-                <a:latin typeface="Plus Jakarta Sans" pitchFamily="34" charset="0"/>
-                <a:ea typeface="Plus Jakarta Sans" pitchFamily="34" charset="-122"/>
-                <a:cs typeface="Plus Jakarta Sans" pitchFamily="34" charset="-120"/>
+                <a:latin typeface="Times New Roman" pitchFamily="34" charset="0"/>
+                <a:ea typeface="Times New Roman" pitchFamily="34" charset="-122"/>
+                <a:cs typeface="Times New Roman" pitchFamily="34" charset="-120"/>
               </a:rPr>
               <a:t>Frontend Client</a:t>
             </a:r>
@@ -2418,9 +2418,9 @@
                 <a:solidFill>
                   <a:srgbClr val="947DEE"/>
                 </a:solidFill>
-                <a:latin typeface="Outfit" pitchFamily="34" charset="0"/>
-                <a:ea typeface="Outfit" pitchFamily="34" charset="-122"/>
-                <a:cs typeface="Outfit" pitchFamily="34" charset="-120"/>
+                <a:latin typeface="Times New Roman" pitchFamily="34" charset="0"/>
+                <a:ea typeface="Times New Roman" pitchFamily="34" charset="-122"/>
+                <a:cs typeface="Times New Roman" pitchFamily="34" charset="-120"/>
               </a:rPr>
               <a:t>Vue 3 + Vite + TypeScript</a:t>
             </a:r>
@@ -2482,9 +2482,9 @@
                 <a:solidFill>
                   <a:srgbClr val="9589B0"/>
                 </a:solidFill>
-                <a:latin typeface="Plus Jakarta Sans" pitchFamily="34" charset="0"/>
-                <a:ea typeface="Plus Jakarta Sans" pitchFamily="34" charset="-122"/>
-                <a:cs typeface="Plus Jakarta Sans" pitchFamily="34" charset="-120"/>
+                <a:latin typeface="Times New Roman" pitchFamily="34" charset="0"/>
+                <a:ea typeface="Times New Roman" pitchFamily="34" charset="-122"/>
+                <a:cs typeface="Times New Roman" pitchFamily="34" charset="-120"/>
               </a:rPr>
               <a:t>API Gateway</a:t>
             </a:r>
@@ -2521,9 +2521,9 @@
                 <a:solidFill>
                   <a:srgbClr val="10B981"/>
                 </a:solidFill>
-                <a:latin typeface="Outfit" pitchFamily="34" charset="0"/>
-                <a:ea typeface="Outfit" pitchFamily="34" charset="-122"/>
-                <a:cs typeface="Outfit" pitchFamily="34" charset="-120"/>
+                <a:latin typeface="Times New Roman" pitchFamily="34" charset="0"/>
+                <a:ea typeface="Times New Roman" pitchFamily="34" charset="-122"/>
+                <a:cs typeface="Times New Roman" pitchFamily="34" charset="-120"/>
               </a:rPr>
               <a:t>Next.js 16 Route Handlers</a:t>
             </a:r>
@@ -2585,9 +2585,9 @@
                 <a:solidFill>
                   <a:srgbClr val="9589B0"/>
                 </a:solidFill>
-                <a:latin typeface="Plus Jakarta Sans" pitchFamily="34" charset="0"/>
-                <a:ea typeface="Plus Jakarta Sans" pitchFamily="34" charset="-122"/>
-                <a:cs typeface="Plus Jakarta Sans" pitchFamily="34" charset="-120"/>
+                <a:latin typeface="Times New Roman" pitchFamily="34" charset="0"/>
+                <a:ea typeface="Times New Roman" pitchFamily="34" charset="-122"/>
+                <a:cs typeface="Times New Roman" pitchFamily="34" charset="-120"/>
               </a:rPr>
               <a:t>Auth &amp; Security</a:t>
             </a:r>
@@ -2624,9 +2624,9 @@
                 <a:solidFill>
                   <a:srgbClr val="F43F5E"/>
                 </a:solidFill>
-                <a:latin typeface="Outfit" pitchFamily="34" charset="0"/>
-                <a:ea typeface="Outfit" pitchFamily="34" charset="-122"/>
-                <a:cs typeface="Outfit" pitchFamily="34" charset="-120"/>
+                <a:latin typeface="Times New Roman" pitchFamily="34" charset="0"/>
+                <a:ea typeface="Times New Roman" pitchFamily="34" charset="-122"/>
+                <a:cs typeface="Times New Roman" pitchFamily="34" charset="-120"/>
               </a:rPr>
               <a:t>Supabase JWT (Bearer Token)</a:t>
             </a:r>
@@ -2688,9 +2688,9 @@
                 <a:solidFill>
                   <a:srgbClr val="9589B0"/>
                 </a:solidFill>
-                <a:latin typeface="Plus Jakarta Sans" pitchFamily="34" charset="0"/>
-                <a:ea typeface="Plus Jakarta Sans" pitchFamily="34" charset="-122"/>
-                <a:cs typeface="Plus Jakarta Sans" pitchFamily="34" charset="-120"/>
+                <a:latin typeface="Times New Roman" pitchFamily="34" charset="0"/>
+                <a:ea typeface="Times New Roman" pitchFamily="34" charset="-122"/>
+                <a:cs typeface="Times New Roman" pitchFamily="34" charset="-120"/>
               </a:rPr>
               <a:t>Data Layer</a:t>
             </a:r>
@@ -2727,9 +2727,9 @@
                 <a:solidFill>
                   <a:srgbClr val="38BDF8"/>
                 </a:solidFill>
-                <a:latin typeface="Outfit" pitchFamily="34" charset="0"/>
-                <a:ea typeface="Outfit" pitchFamily="34" charset="-122"/>
-                <a:cs typeface="Outfit" pitchFamily="34" charset="-120"/>
+                <a:latin typeface="Times New Roman" pitchFamily="34" charset="0"/>
+                <a:ea typeface="Times New Roman" pitchFamily="34" charset="-122"/>
+                <a:cs typeface="Times New Roman" pitchFamily="34" charset="-120"/>
               </a:rPr>
               <a:t>Prisma 7 + PostgreSQL Pooler</a:t>
             </a:r>
@@ -2791,9 +2791,9 @@
                 <a:solidFill>
                   <a:srgbClr val="9589B0"/>
                 </a:solidFill>
-                <a:latin typeface="Plus Jakarta Sans" pitchFamily="34" charset="0"/>
-                <a:ea typeface="Plus Jakarta Sans" pitchFamily="34" charset="-122"/>
-                <a:cs typeface="Plus Jakarta Sans" pitchFamily="34" charset="-120"/>
+                <a:latin typeface="Times New Roman" pitchFamily="34" charset="0"/>
+                <a:ea typeface="Times New Roman" pitchFamily="34" charset="-122"/>
+                <a:cs typeface="Times New Roman" pitchFamily="34" charset="-120"/>
               </a:rPr>
               <a:t>AI Intelligence</a:t>
             </a:r>
@@ -2830,9 +2830,9 @@
                 <a:solidFill>
                   <a:srgbClr val="F59E0B"/>
                 </a:solidFill>
-                <a:latin typeface="Outfit" pitchFamily="34" charset="0"/>
-                <a:ea typeface="Outfit" pitchFamily="34" charset="-122"/>
-                <a:cs typeface="Outfit" pitchFamily="34" charset="-120"/>
+                <a:latin typeface="Times New Roman" pitchFamily="34" charset="0"/>
+                <a:ea typeface="Times New Roman" pitchFamily="34" charset="-122"/>
+                <a:cs typeface="Times New Roman" pitchFamily="34" charset="-120"/>
               </a:rPr>
               <a:t>PawDoctor 24/7 Clinical Triage</a:t>
             </a:r>
@@ -2894,9 +2894,9 @@
                 <a:solidFill>
                   <a:srgbClr val="9589B0"/>
                 </a:solidFill>
-                <a:latin typeface="Plus Jakarta Sans" pitchFamily="34" charset="0"/>
-                <a:ea typeface="Plus Jakarta Sans" pitchFamily="34" charset="-122"/>
-                <a:cs typeface="Plus Jakarta Sans" pitchFamily="34" charset="-120"/>
+                <a:latin typeface="Times New Roman" pitchFamily="34" charset="0"/>
+                <a:ea typeface="Times New Roman" pitchFamily="34" charset="-122"/>
+                <a:cs typeface="Times New Roman" pitchFamily="34" charset="-120"/>
               </a:rPr>
               <a:t>Deployment</a:t>
             </a:r>
@@ -2933,9 +2933,9 @@
                 <a:solidFill>
                   <a:srgbClr val="A78BFA"/>
                 </a:solidFill>
-                <a:latin typeface="Outfit" pitchFamily="34" charset="0"/>
-                <a:ea typeface="Outfit" pitchFamily="34" charset="-122"/>
-                <a:cs typeface="Outfit" pitchFamily="34" charset="-120"/>
+                <a:latin typeface="Times New Roman" pitchFamily="34" charset="0"/>
+                <a:ea typeface="Times New Roman" pitchFamily="34" charset="-122"/>
+                <a:cs typeface="Times New Roman" pitchFamily="34" charset="-120"/>
               </a:rPr>
               <a:t>Vercel Serverless + Netlify Edge</a:t>
             </a:r>
@@ -2972,9 +2972,9 @@
                 <a:solidFill>
                   <a:srgbClr val="9589B0"/>
                 </a:solidFill>
-                <a:latin typeface="Plus Jakarta Sans" pitchFamily="34" charset="0"/>
-                <a:ea typeface="Plus Jakarta Sans" pitchFamily="34" charset="-122"/>
-                <a:cs typeface="Plus Jakarta Sans" pitchFamily="34" charset="-120"/>
+                <a:latin typeface="Times New Roman" pitchFamily="34" charset="0"/>
+                <a:ea typeface="Times New Roman" pitchFamily="34" charset="-122"/>
+                <a:cs typeface="Times New Roman" pitchFamily="34" charset="-120"/>
               </a:rPr>
               <a:t>Technopreneurship 2026 • Abu Zafor, Nadim Rahman, Rizvi Sarker</a:t>
             </a:r>
@@ -3068,9 +3068,9 @@
                 <a:solidFill>
                   <a:srgbClr val="7C3AED"/>
                 </a:solidFill>
-                <a:latin typeface="Outfit" pitchFamily="34" charset="0"/>
-                <a:ea typeface="Outfit" pitchFamily="34" charset="-122"/>
-                <a:cs typeface="Outfit" pitchFamily="34" charset="-120"/>
+                <a:latin typeface="Times New Roman" pitchFamily="34" charset="0"/>
+                <a:ea typeface="Times New Roman" pitchFamily="34" charset="-122"/>
+                <a:cs typeface="Times New Roman" pitchFamily="34" charset="-120"/>
               </a:rPr>
               <a:t>🐾 Nuzzle Engine</a:t>
             </a:r>
@@ -3107,9 +3107,9 @@
                 <a:solidFill>
                   <a:srgbClr val="5F5377"/>
                 </a:solidFill>
-                <a:latin typeface="Plus Jakarta Sans" pitchFamily="34" charset="0"/>
-                <a:ea typeface="Plus Jakarta Sans" pitchFamily="34" charset="-122"/>
-                <a:cs typeface="Plus Jakarta Sans" pitchFamily="34" charset="-120"/>
+                <a:latin typeface="Times New Roman" pitchFamily="34" charset="0"/>
+                <a:ea typeface="Times New Roman" pitchFamily="34" charset="-122"/>
+                <a:cs typeface="Times New Roman" pitchFamily="34" charset="-120"/>
               </a:rPr>
               <a:t>Slide 10 / 10 • Full-Stack REST API Architecture</a:t>
             </a:r>
@@ -3146,9 +3146,9 @@
                 <a:solidFill>
                   <a:srgbClr val="7C3AED"/>
                 </a:solidFill>
-                <a:latin typeface="Plus Jakarta Sans" pitchFamily="34" charset="0"/>
-                <a:ea typeface="Plus Jakarta Sans" pitchFamily="34" charset="-122"/>
-                <a:cs typeface="Plus Jakarta Sans" pitchFamily="34" charset="-120"/>
+                <a:latin typeface="Times New Roman" pitchFamily="34" charset="0"/>
+                <a:ea typeface="Times New Roman" pitchFamily="34" charset="-122"/>
+                <a:cs typeface="Times New Roman" pitchFamily="34" charset="-120"/>
               </a:rPr>
               <a:t>PRODUCTION INFRASTRUCTURE</a:t>
             </a:r>
@@ -3185,9 +3185,9 @@
                 <a:solidFill>
                   <a:srgbClr val="261E38"/>
                 </a:solidFill>
-                <a:latin typeface="Outfit" pitchFamily="34" charset="0"/>
-                <a:ea typeface="Outfit" pitchFamily="34" charset="-122"/>
-                <a:cs typeface="Outfit" pitchFamily="34" charset="-120"/>
+                <a:latin typeface="Times New Roman" pitchFamily="34" charset="0"/>
+                <a:ea typeface="Times New Roman" pitchFamily="34" charset="-122"/>
+                <a:cs typeface="Times New Roman" pitchFamily="34" charset="-120"/>
               </a:rPr>
               <a:t>Cloud Deployment Topology &amp; Full-Stack Summary</a:t>
             </a:r>
@@ -3247,9 +3247,9 @@
                 <a:solidFill>
                   <a:srgbClr val="9589B0"/>
                 </a:solidFill>
-                <a:latin typeface="Plus Jakarta Sans" pitchFamily="34" charset="0"/>
-                <a:ea typeface="Plus Jakarta Sans" pitchFamily="34" charset="-122"/>
-                <a:cs typeface="Plus Jakarta Sans" pitchFamily="34" charset="-120"/>
+                <a:latin typeface="Times New Roman" pitchFamily="34" charset="0"/>
+                <a:ea typeface="Times New Roman" pitchFamily="34" charset="-122"/>
+                <a:cs typeface="Times New Roman" pitchFamily="34" charset="-120"/>
               </a:rPr>
               <a:t>Nuzzle API v2.0 • Abu Zafor, Nadim Rahman, Rizvi Sarker • Technopreneurship 2026</a:t>
             </a:r>
@@ -3311,9 +3311,9 @@
                 <a:solidFill>
                   <a:srgbClr val="7C3AED"/>
                 </a:solidFill>
-                <a:latin typeface="Plus Jakarta Sans" pitchFamily="34" charset="0"/>
-                <a:ea typeface="Plus Jakarta Sans" pitchFamily="34" charset="-122"/>
-                <a:cs typeface="Plus Jakarta Sans" pitchFamily="34" charset="-120"/>
+                <a:latin typeface="Times New Roman" pitchFamily="34" charset="0"/>
+                <a:ea typeface="Times New Roman" pitchFamily="34" charset="-122"/>
+                <a:cs typeface="Times New Roman" pitchFamily="34" charset="-120"/>
               </a:rPr>
               <a:t>PRODUCTION CLOUD TOPOLOGY</a:t>
             </a:r>
@@ -3411,9 +3411,9 @@
                 <a:solidFill>
                   <a:srgbClr val="9589B0"/>
                 </a:solidFill>
-                <a:latin typeface="Plus Jakarta Sans" pitchFamily="34" charset="0"/>
-                <a:ea typeface="Plus Jakarta Sans" pitchFamily="34" charset="-122"/>
-                <a:cs typeface="Plus Jakarta Sans" pitchFamily="34" charset="-120"/>
+                <a:latin typeface="Times New Roman" pitchFamily="34" charset="0"/>
+                <a:ea typeface="Times New Roman" pitchFamily="34" charset="-122"/>
+                <a:cs typeface="Times New Roman" pitchFamily="34" charset="-120"/>
               </a:rPr>
               <a:t>Frontend Hosting</a:t>
             </a:r>
@@ -3450,9 +3450,9 @@
                 <a:solidFill>
                   <a:srgbClr val="261E38"/>
                 </a:solidFill>
-                <a:latin typeface="Outfit" pitchFamily="34" charset="0"/>
-                <a:ea typeface="Outfit" pitchFamily="34" charset="-122"/>
-                <a:cs typeface="Outfit" pitchFamily="34" charset="-120"/>
+                <a:latin typeface="Times New Roman" pitchFamily="34" charset="0"/>
+                <a:ea typeface="Times New Roman" pitchFamily="34" charset="-122"/>
+                <a:cs typeface="Times New Roman" pitchFamily="34" charset="-120"/>
               </a:rPr>
               <a:t>Vercel / Netlify (SPA Rewrites via vercel.json)</a:t>
             </a:r>
@@ -3550,9 +3550,9 @@
                 <a:solidFill>
                   <a:srgbClr val="9589B0"/>
                 </a:solidFill>
-                <a:latin typeface="Plus Jakarta Sans" pitchFamily="34" charset="0"/>
-                <a:ea typeface="Plus Jakarta Sans" pitchFamily="34" charset="-122"/>
-                <a:cs typeface="Plus Jakarta Sans" pitchFamily="34" charset="-120"/>
+                <a:latin typeface="Times New Roman" pitchFamily="34" charset="0"/>
+                <a:ea typeface="Times New Roman" pitchFamily="34" charset="-122"/>
+                <a:cs typeface="Times New Roman" pitchFamily="34" charset="-120"/>
               </a:rPr>
               <a:t>Backend API Engine</a:t>
             </a:r>
@@ -3589,9 +3589,9 @@
                 <a:solidFill>
                   <a:srgbClr val="261E38"/>
                 </a:solidFill>
-                <a:latin typeface="Outfit" pitchFamily="34" charset="0"/>
-                <a:ea typeface="Outfit" pitchFamily="34" charset="-122"/>
-                <a:cs typeface="Outfit" pitchFamily="34" charset="-120"/>
+                <a:latin typeface="Times New Roman" pitchFamily="34" charset="0"/>
+                <a:ea typeface="Times New Roman" pitchFamily="34" charset="-122"/>
+                <a:cs typeface="Times New Roman" pitchFamily="34" charset="-120"/>
               </a:rPr>
               <a:t>Vercel Serverless Functions (Next.js 16)</a:t>
             </a:r>
@@ -3689,9 +3689,9 @@
                 <a:solidFill>
                   <a:srgbClr val="9589B0"/>
                 </a:solidFill>
-                <a:latin typeface="Plus Jakarta Sans" pitchFamily="34" charset="0"/>
-                <a:ea typeface="Plus Jakarta Sans" pitchFamily="34" charset="-122"/>
-                <a:cs typeface="Plus Jakarta Sans" pitchFamily="34" charset="-120"/>
+                <a:latin typeface="Times New Roman" pitchFamily="34" charset="0"/>
+                <a:ea typeface="Times New Roman" pitchFamily="34" charset="-122"/>
+                <a:cs typeface="Times New Roman" pitchFamily="34" charset="-120"/>
               </a:rPr>
               <a:t>Database Cloud</a:t>
             </a:r>
@@ -3728,9 +3728,9 @@
                 <a:solidFill>
                   <a:srgbClr val="261E38"/>
                 </a:solidFill>
-                <a:latin typeface="Outfit" pitchFamily="34" charset="0"/>
-                <a:ea typeface="Outfit" pitchFamily="34" charset="-122"/>
-                <a:cs typeface="Outfit" pitchFamily="34" charset="-120"/>
+                <a:latin typeface="Times New Roman" pitchFamily="34" charset="0"/>
+                <a:ea typeface="Times New Roman" pitchFamily="34" charset="-122"/>
+                <a:cs typeface="Times New Roman" pitchFamily="34" charset="-120"/>
               </a:rPr>
               <a:t>Supabase PostgreSQL (18 Models Synchronized)</a:t>
             </a:r>
@@ -3828,9 +3828,9 @@
                 <a:solidFill>
                   <a:srgbClr val="9589B0"/>
                 </a:solidFill>
-                <a:latin typeface="Plus Jakarta Sans" pitchFamily="34" charset="0"/>
-                <a:ea typeface="Plus Jakarta Sans" pitchFamily="34" charset="-122"/>
-                <a:cs typeface="Plus Jakarta Sans" pitchFamily="34" charset="-120"/>
+                <a:latin typeface="Times New Roman" pitchFamily="34" charset="0"/>
+                <a:ea typeface="Times New Roman" pitchFamily="34" charset="-122"/>
+                <a:cs typeface="Times New Roman" pitchFamily="34" charset="-120"/>
               </a:rPr>
               <a:t>Authentication</a:t>
             </a:r>
@@ -3867,9 +3867,9 @@
                 <a:solidFill>
                   <a:srgbClr val="261E38"/>
                 </a:solidFill>
-                <a:latin typeface="Outfit" pitchFamily="34" charset="0"/>
-                <a:ea typeface="Outfit" pitchFamily="34" charset="-122"/>
-                <a:cs typeface="Outfit" pitchFamily="34" charset="-120"/>
+                <a:latin typeface="Times New Roman" pitchFamily="34" charset="0"/>
+                <a:ea typeface="Times New Roman" pitchFamily="34" charset="-122"/>
+                <a:cs typeface="Times New Roman" pitchFamily="34" charset="-120"/>
               </a:rPr>
               <a:t>Supabase Auth (JWT Bearer Token Flow)</a:t>
             </a:r>
@@ -3931,9 +3931,9 @@
                 <a:solidFill>
                   <a:srgbClr val="7C3AED"/>
                 </a:solidFill>
-                <a:latin typeface="Plus Jakarta Sans" pitchFamily="34" charset="0"/>
-                <a:ea typeface="Plus Jakarta Sans" pitchFamily="34" charset="-122"/>
-                <a:cs typeface="Plus Jakarta Sans" pitchFamily="34" charset="-120"/>
+                <a:latin typeface="Times New Roman" pitchFamily="34" charset="0"/>
+                <a:ea typeface="Times New Roman" pitchFamily="34" charset="-122"/>
+                <a:cs typeface="Times New Roman" pitchFamily="34" charset="-120"/>
               </a:rPr>
               <a:t>FULL-STACK REPOSITORIES &amp; METRICS</a:t>
             </a:r>
@@ -3995,9 +3995,9 @@
                 <a:solidFill>
                   <a:srgbClr val="7C3AED"/>
                 </a:solidFill>
-                <a:latin typeface="Outfit" pitchFamily="34" charset="0"/>
-                <a:ea typeface="Outfit" pitchFamily="34" charset="-122"/>
-                <a:cs typeface="Outfit" pitchFamily="34" charset="-120"/>
+                <a:latin typeface="Times New Roman" pitchFamily="34" charset="0"/>
+                <a:ea typeface="Times New Roman" pitchFamily="34" charset="-122"/>
+                <a:cs typeface="Times New Roman" pitchFamily="34" charset="-120"/>
               </a:rPr>
               <a:t>18+</a:t>
             </a:r>
@@ -4034,9 +4034,9 @@
                 <a:solidFill>
                   <a:srgbClr val="5F5377"/>
                 </a:solidFill>
-                <a:latin typeface="Plus Jakarta Sans" pitchFamily="34" charset="0"/>
-                <a:ea typeface="Plus Jakarta Sans" pitchFamily="34" charset="-122"/>
-                <a:cs typeface="Plus Jakarta Sans" pitchFamily="34" charset="-120"/>
+                <a:latin typeface="Times New Roman" pitchFamily="34" charset="0"/>
+                <a:ea typeface="Times New Roman" pitchFamily="34" charset="-122"/>
+                <a:cs typeface="Times New Roman" pitchFamily="34" charset="-120"/>
               </a:rPr>
               <a:t>REST Route Handlers</a:t>
             </a:r>
@@ -4098,9 +4098,9 @@
                 <a:solidFill>
                   <a:srgbClr val="10B981"/>
                 </a:solidFill>
-                <a:latin typeface="Outfit" pitchFamily="34" charset="0"/>
-                <a:ea typeface="Outfit" pitchFamily="34" charset="-122"/>
-                <a:cs typeface="Outfit" pitchFamily="34" charset="-120"/>
+                <a:latin typeface="Times New Roman" pitchFamily="34" charset="0"/>
+                <a:ea typeface="Times New Roman" pitchFamily="34" charset="-122"/>
+                <a:cs typeface="Times New Roman" pitchFamily="34" charset="-120"/>
               </a:rPr>
               <a:t>18</a:t>
             </a:r>
@@ -4137,9 +4137,9 @@
                 <a:solidFill>
                   <a:srgbClr val="5F5377"/>
                 </a:solidFill>
-                <a:latin typeface="Plus Jakarta Sans" pitchFamily="34" charset="0"/>
-                <a:ea typeface="Plus Jakarta Sans" pitchFamily="34" charset="-122"/>
-                <a:cs typeface="Plus Jakarta Sans" pitchFamily="34" charset="-120"/>
+                <a:latin typeface="Times New Roman" pitchFamily="34" charset="0"/>
+                <a:ea typeface="Times New Roman" pitchFamily="34" charset="-122"/>
+                <a:cs typeface="Times New Roman" pitchFamily="34" charset="-120"/>
               </a:rPr>
               <a:t>Database Models</a:t>
             </a:r>
@@ -4201,9 +4201,9 @@
                 <a:solidFill>
                   <a:srgbClr val="6366F1"/>
                 </a:solidFill>
-                <a:latin typeface="Outfit" pitchFamily="34" charset="0"/>
-                <a:ea typeface="Outfit" pitchFamily="34" charset="-122"/>
-                <a:cs typeface="Outfit" pitchFamily="34" charset="-120"/>
+                <a:latin typeface="Times New Roman" pitchFamily="34" charset="0"/>
+                <a:ea typeface="Times New Roman" pitchFamily="34" charset="-122"/>
+                <a:cs typeface="Times New Roman" pitchFamily="34" charset="-120"/>
               </a:rPr>
               <a:t>3</a:t>
             </a:r>
@@ -4240,9 +4240,9 @@
                 <a:solidFill>
                   <a:srgbClr val="5F5377"/>
                 </a:solidFill>
-                <a:latin typeface="Plus Jakarta Sans" pitchFamily="34" charset="0"/>
-                <a:ea typeface="Plus Jakarta Sans" pitchFamily="34" charset="-122"/>
-                <a:cs typeface="Plus Jakarta Sans" pitchFamily="34" charset="-120"/>
+                <a:latin typeface="Times New Roman" pitchFamily="34" charset="0"/>
+                <a:ea typeface="Times New Roman" pitchFamily="34" charset="-122"/>
+                <a:cs typeface="Times New Roman" pitchFamily="34" charset="-120"/>
               </a:rPr>
               <a:t>User Roles (Parent/Store/Vet)</a:t>
             </a:r>
@@ -4304,9 +4304,9 @@
                 <a:solidFill>
                   <a:srgbClr val="F43F5E"/>
                 </a:solidFill>
-                <a:latin typeface="Outfit" pitchFamily="34" charset="0"/>
-                <a:ea typeface="Outfit" pitchFamily="34" charset="-122"/>
-                <a:cs typeface="Outfit" pitchFamily="34" charset="-120"/>
+                <a:latin typeface="Times New Roman" pitchFamily="34" charset="0"/>
+                <a:ea typeface="Times New Roman" pitchFamily="34" charset="-122"/>
+                <a:cs typeface="Times New Roman" pitchFamily="34" charset="-120"/>
               </a:rPr>
               <a:t>100%</a:t>
             </a:r>
@@ -4343,9 +4343,9 @@
                 <a:solidFill>
                   <a:srgbClr val="5F5377"/>
                 </a:solidFill>
-                <a:latin typeface="Plus Jakarta Sans" pitchFamily="34" charset="0"/>
-                <a:ea typeface="Plus Jakarta Sans" pitchFamily="34" charset="-122"/>
-                <a:cs typeface="Plus Jakarta Sans" pitchFamily="34" charset="-120"/>
+                <a:latin typeface="Times New Roman" pitchFamily="34" charset="0"/>
+                <a:ea typeface="Times New Roman" pitchFamily="34" charset="-122"/>
+                <a:cs typeface="Times New Roman" pitchFamily="34" charset="-120"/>
               </a:rPr>
               <a:t>Type-Safe (TypeScript)</a:t>
             </a:r>
@@ -4407,9 +4407,9 @@
                 <a:solidFill>
                   <a:srgbClr val="7C3AED"/>
                 </a:solidFill>
-                <a:latin typeface="Plus Jakarta Sans" pitchFamily="34" charset="0"/>
-                <a:ea typeface="Plus Jakarta Sans" pitchFamily="34" charset="-122"/>
-                <a:cs typeface="Plus Jakarta Sans" pitchFamily="34" charset="-120"/>
+                <a:latin typeface="Times New Roman" pitchFamily="34" charset="0"/>
+                <a:ea typeface="Times New Roman" pitchFamily="34" charset="-122"/>
+                <a:cs typeface="Times New Roman" pitchFamily="34" charset="-120"/>
               </a:rPr>
               <a:t>📦 GITHUB REPOSITORIES:</a:t>
             </a:r>
@@ -4585,9 +4585,9 @@
                 <a:solidFill>
                   <a:srgbClr val="7C3AED"/>
                 </a:solidFill>
-                <a:latin typeface="Outfit" pitchFamily="34" charset="0"/>
-                <a:ea typeface="Outfit" pitchFamily="34" charset="-122"/>
-                <a:cs typeface="Outfit" pitchFamily="34" charset="-120"/>
+                <a:latin typeface="Times New Roman" pitchFamily="34" charset="0"/>
+                <a:ea typeface="Times New Roman" pitchFamily="34" charset="-122"/>
+                <a:cs typeface="Times New Roman" pitchFamily="34" charset="-120"/>
               </a:rPr>
               <a:t>🐾 Nuzzle Engine</a:t>
             </a:r>
@@ -4624,9 +4624,9 @@
                 <a:solidFill>
                   <a:srgbClr val="5F5377"/>
                 </a:solidFill>
-                <a:latin typeface="Plus Jakarta Sans" pitchFamily="34" charset="0"/>
-                <a:ea typeface="Plus Jakarta Sans" pitchFamily="34" charset="-122"/>
-                <a:cs typeface="Plus Jakarta Sans" pitchFamily="34" charset="-120"/>
+                <a:latin typeface="Times New Roman" pitchFamily="34" charset="0"/>
+                <a:ea typeface="Times New Roman" pitchFamily="34" charset="-122"/>
+                <a:cs typeface="Times New Roman" pitchFamily="34" charset="-120"/>
               </a:rPr>
               <a:t>Slide 2 / 10 • Full-Stack REST API Architecture</a:t>
             </a:r>
@@ -4663,9 +4663,9 @@
                 <a:solidFill>
                   <a:srgbClr val="7C3AED"/>
                 </a:solidFill>
-                <a:latin typeface="Plus Jakarta Sans" pitchFamily="34" charset="0"/>
-                <a:ea typeface="Plus Jakarta Sans" pitchFamily="34" charset="-122"/>
-                <a:cs typeface="Plus Jakarta Sans" pitchFamily="34" charset="-120"/>
+                <a:latin typeface="Times New Roman" pitchFamily="34" charset="0"/>
+                <a:ea typeface="Times New Roman" pitchFamily="34" charset="-122"/>
+                <a:cs typeface="Times New Roman" pitchFamily="34" charset="-120"/>
               </a:rPr>
               <a:t>SYSTEM DESIGN &amp; ARCHITECTURE</a:t>
             </a:r>
@@ -4702,9 +4702,9 @@
                 <a:solidFill>
                   <a:srgbClr val="261E38"/>
                 </a:solidFill>
-                <a:latin typeface="Outfit" pitchFamily="34" charset="0"/>
-                <a:ea typeface="Outfit" pitchFamily="34" charset="-122"/>
-                <a:cs typeface="Outfit" pitchFamily="34" charset="-120"/>
+                <a:latin typeface="Times New Roman" pitchFamily="34" charset="0"/>
+                <a:ea typeface="Times New Roman" pitchFamily="34" charset="-122"/>
+                <a:cs typeface="Times New Roman" pitchFamily="34" charset="-120"/>
               </a:rPr>
               <a:t>Decoupled Three-Tier Full-Stack Infrastructure</a:t>
             </a:r>
@@ -4764,9 +4764,9 @@
                 <a:solidFill>
                   <a:srgbClr val="9589B0"/>
                 </a:solidFill>
-                <a:latin typeface="Plus Jakarta Sans" pitchFamily="34" charset="0"/>
-                <a:ea typeface="Plus Jakarta Sans" pitchFamily="34" charset="-122"/>
-                <a:cs typeface="Plus Jakarta Sans" pitchFamily="34" charset="-120"/>
+                <a:latin typeface="Times New Roman" pitchFamily="34" charset="0"/>
+                <a:ea typeface="Times New Roman" pitchFamily="34" charset="-122"/>
+                <a:cs typeface="Times New Roman" pitchFamily="34" charset="-120"/>
               </a:rPr>
               <a:t>Nuzzle API v2.0 • Abu Zafor, Nadim Rahman, Rizvi Sarker • Technopreneurship 2026</a:t>
             </a:r>
@@ -4853,9 +4853,9 @@
                 <a:solidFill>
                   <a:srgbClr val="15803D"/>
                 </a:solidFill>
-                <a:latin typeface="Plus Jakarta Sans" pitchFamily="34" charset="0"/>
-                <a:ea typeface="Plus Jakarta Sans" pitchFamily="34" charset="-122"/>
-                <a:cs typeface="Plus Jakarta Sans" pitchFamily="34" charset="-120"/>
+                <a:latin typeface="Times New Roman" pitchFamily="34" charset="0"/>
+                <a:ea typeface="Times New Roman" pitchFamily="34" charset="-122"/>
+                <a:cs typeface="Times New Roman" pitchFamily="34" charset="-120"/>
               </a:rPr>
               <a:t>TIER 1</a:t>
             </a:r>
@@ -4892,9 +4892,9 @@
                 <a:solidFill>
                   <a:srgbClr val="261E38"/>
                 </a:solidFill>
-                <a:latin typeface="Outfit" pitchFamily="34" charset="0"/>
-                <a:ea typeface="Outfit" pitchFamily="34" charset="-122"/>
-                <a:cs typeface="Outfit" pitchFamily="34" charset="-120"/>
+                <a:latin typeface="Times New Roman" pitchFamily="34" charset="0"/>
+                <a:ea typeface="Times New Roman" pitchFamily="34" charset="-122"/>
+                <a:cs typeface="Times New Roman" pitchFamily="34" charset="-120"/>
               </a:rPr>
               <a:t>Client Presentation Layer</a:t>
             </a:r>
@@ -4931,9 +4931,9 @@
                 <a:solidFill>
                   <a:srgbClr val="7C3AED"/>
                 </a:solidFill>
-                <a:latin typeface="Plus Jakarta Sans" pitchFamily="34" charset="0"/>
-                <a:ea typeface="Plus Jakarta Sans" pitchFamily="34" charset="-122"/>
-                <a:cs typeface="Plus Jakarta Sans" pitchFamily="34" charset="-120"/>
+                <a:latin typeface="Times New Roman" pitchFamily="34" charset="0"/>
+                <a:ea typeface="Times New Roman" pitchFamily="34" charset="-122"/>
+                <a:cs typeface="Times New Roman" pitchFamily="34" charset="-120"/>
               </a:rPr>
               <a:t>Vue 3 + Vite + TypeScript</a:t>
             </a:r>
@@ -4973,9 +4973,9 @@
                 <a:solidFill>
                   <a:srgbClr val="5F5377"/>
                 </a:solidFill>
-                <a:latin typeface="Plus Jakarta Sans" pitchFamily="34" charset="0"/>
-                <a:ea typeface="Plus Jakarta Sans" pitchFamily="34" charset="-122"/>
-                <a:cs typeface="Plus Jakarta Sans" pitchFamily="34" charset="-120"/>
+                <a:latin typeface="Times New Roman" pitchFamily="34" charset="0"/>
+                <a:ea typeface="Times New Roman" pitchFamily="34" charset="-122"/>
+                <a:cs typeface="Times New Roman" pitchFamily="34" charset="-120"/>
               </a:rPr>
               <a:t>Reactive UI state management via appStore.ts, optimistic tactile interactions, component modules, and typed API service clients.</a:t>
             </a:r>
@@ -5035,9 +5035,9 @@
                 <a:solidFill>
                   <a:srgbClr val="9589B0"/>
                 </a:solidFill>
-                <a:latin typeface="Plus Jakarta Sans" pitchFamily="34" charset="0"/>
-                <a:ea typeface="Plus Jakarta Sans" pitchFamily="34" charset="-122"/>
-                <a:cs typeface="Plus Jakarta Sans" pitchFamily="34" charset="-120"/>
+                <a:latin typeface="Times New Roman" pitchFamily="34" charset="0"/>
+                <a:ea typeface="Times New Roman" pitchFamily="34" charset="-122"/>
+                <a:cs typeface="Times New Roman" pitchFamily="34" charset="-120"/>
               </a:rPr>
               <a:t>CORE CAPABILITIES:</a:t>
             </a:r>
@@ -5077,9 +5077,9 @@
                 <a:solidFill>
                   <a:srgbClr val="261E38"/>
                 </a:solidFill>
-                <a:latin typeface="Plus Jakarta Sans" pitchFamily="34" charset="0"/>
-                <a:ea typeface="Plus Jakarta Sans" pitchFamily="34" charset="-122"/>
-                <a:cs typeface="Plus Jakarta Sans" pitchFamily="34" charset="-120"/>
+                <a:latin typeface="Times New Roman" pitchFamily="34" charset="0"/>
+                <a:ea typeface="Times New Roman" pitchFamily="34" charset="-122"/>
+                <a:cs typeface="Times New Roman" pitchFamily="34" charset="-120"/>
               </a:rPr>
               <a:t>• Typed HTTP Client (apiClient.ts)</a:t>
             </a:r>
@@ -5119,9 +5119,9 @@
                 <a:solidFill>
                   <a:srgbClr val="261E38"/>
                 </a:solidFill>
-                <a:latin typeface="Plus Jakarta Sans" pitchFamily="34" charset="0"/>
-                <a:ea typeface="Plus Jakarta Sans" pitchFamily="34" charset="-122"/>
-                <a:cs typeface="Plus Jakarta Sans" pitchFamily="34" charset="-120"/>
+                <a:latin typeface="Times New Roman" pitchFamily="34" charset="0"/>
+                <a:ea typeface="Times New Roman" pitchFamily="34" charset="-122"/>
+                <a:cs typeface="Times New Roman" pitchFamily="34" charset="-120"/>
               </a:rPr>
               <a:t>• Optimistic UI state dispatch</a:t>
             </a:r>
@@ -5161,9 +5161,9 @@
                 <a:solidFill>
                   <a:srgbClr val="261E38"/>
                 </a:solidFill>
-                <a:latin typeface="Plus Jakarta Sans" pitchFamily="34" charset="0"/>
-                <a:ea typeface="Plus Jakarta Sans" pitchFamily="34" charset="-122"/>
-                <a:cs typeface="Plus Jakarta Sans" pitchFamily="34" charset="-120"/>
+                <a:latin typeface="Times New Roman" pitchFamily="34" charset="0"/>
+                <a:ea typeface="Times New Roman" pitchFamily="34" charset="-122"/>
+                <a:cs typeface="Times New Roman" pitchFamily="34" charset="-120"/>
               </a:rPr>
               <a:t>• Bearer Token session persistence</a:t>
             </a:r>
@@ -5203,9 +5203,9 @@
                 <a:solidFill>
                   <a:srgbClr val="261E38"/>
                 </a:solidFill>
-                <a:latin typeface="Plus Jakarta Sans" pitchFamily="34" charset="0"/>
-                <a:ea typeface="Plus Jakarta Sans" pitchFamily="34" charset="-122"/>
-                <a:cs typeface="Plus Jakarta Sans" pitchFamily="34" charset="-120"/>
+                <a:latin typeface="Times New Roman" pitchFamily="34" charset="0"/>
+                <a:ea typeface="Times New Roman" pitchFamily="34" charset="-122"/>
+                <a:cs typeface="Times New Roman" pitchFamily="34" charset="-120"/>
               </a:rPr>
               <a:t>• Vite Dev Proxy (/api -&gt; :3000)</a:t>
             </a:r>
@@ -5292,9 +5292,9 @@
                 <a:solidFill>
                   <a:srgbClr val="7C3AED"/>
                 </a:solidFill>
-                <a:latin typeface="Plus Jakarta Sans" pitchFamily="34" charset="0"/>
-                <a:ea typeface="Plus Jakarta Sans" pitchFamily="34" charset="-122"/>
-                <a:cs typeface="Plus Jakarta Sans" pitchFamily="34" charset="-120"/>
+                <a:latin typeface="Times New Roman" pitchFamily="34" charset="0"/>
+                <a:ea typeface="Times New Roman" pitchFamily="34" charset="-122"/>
+                <a:cs typeface="Times New Roman" pitchFamily="34" charset="-120"/>
               </a:rPr>
               <a:t>TIER 2</a:t>
             </a:r>
@@ -5331,9 +5331,9 @@
                 <a:solidFill>
                   <a:srgbClr val="261E38"/>
                 </a:solidFill>
-                <a:latin typeface="Outfit" pitchFamily="34" charset="0"/>
-                <a:ea typeface="Outfit" pitchFamily="34" charset="-122"/>
-                <a:cs typeface="Outfit" pitchFamily="34" charset="-120"/>
+                <a:latin typeface="Times New Roman" pitchFamily="34" charset="0"/>
+                <a:ea typeface="Times New Roman" pitchFamily="34" charset="-122"/>
+                <a:cs typeface="Times New Roman" pitchFamily="34" charset="-120"/>
               </a:rPr>
               <a:t>REST Gateway &amp; Engine</a:t>
             </a:r>
@@ -5370,9 +5370,9 @@
                 <a:solidFill>
                   <a:srgbClr val="7C3AED"/>
                 </a:solidFill>
-                <a:latin typeface="Plus Jakarta Sans" pitchFamily="34" charset="0"/>
-                <a:ea typeface="Plus Jakarta Sans" pitchFamily="34" charset="-122"/>
-                <a:cs typeface="Plus Jakarta Sans" pitchFamily="34" charset="-120"/>
+                <a:latin typeface="Times New Roman" pitchFamily="34" charset="0"/>
+                <a:ea typeface="Times New Roman" pitchFamily="34" charset="-122"/>
+                <a:cs typeface="Times New Roman" pitchFamily="34" charset="-120"/>
               </a:rPr>
               <a:t>Next.js 16 App Router</a:t>
             </a:r>
@@ -5412,9 +5412,9 @@
                 <a:solidFill>
                   <a:srgbClr val="5F5377"/>
                 </a:solidFill>
-                <a:latin typeface="Plus Jakarta Sans" pitchFamily="34" charset="0"/>
-                <a:ea typeface="Plus Jakarta Sans" pitchFamily="34" charset="-122"/>
-                <a:cs typeface="Plus Jakarta Sans" pitchFamily="34" charset="-120"/>
+                <a:latin typeface="Times New Roman" pitchFamily="34" charset="0"/>
+                <a:ea typeface="Times New Roman" pitchFamily="34" charset="-122"/>
+                <a:cs typeface="Times New Roman" pitchFamily="34" charset="-120"/>
               </a:rPr>
               <a:t>Serverless REST Route Handlers under /src/app/api with strict Zod schema validation, CORS headers, and standard JSON envelopes.</a:t>
             </a:r>
@@ -5474,9 +5474,9 @@
                 <a:solidFill>
                   <a:srgbClr val="9589B0"/>
                 </a:solidFill>
-                <a:latin typeface="Plus Jakarta Sans" pitchFamily="34" charset="0"/>
-                <a:ea typeface="Plus Jakarta Sans" pitchFamily="34" charset="-122"/>
-                <a:cs typeface="Plus Jakarta Sans" pitchFamily="34" charset="-120"/>
+                <a:latin typeface="Times New Roman" pitchFamily="34" charset="0"/>
+                <a:ea typeface="Times New Roman" pitchFamily="34" charset="-122"/>
+                <a:cs typeface="Times New Roman" pitchFamily="34" charset="-120"/>
               </a:rPr>
               <a:t>CORE CAPABILITIES:</a:t>
             </a:r>
@@ -5516,9 +5516,9 @@
                 <a:solidFill>
                   <a:srgbClr val="261E38"/>
                 </a:solidFill>
-                <a:latin typeface="Plus Jakarta Sans" pitchFamily="34" charset="0"/>
-                <a:ea typeface="Plus Jakarta Sans" pitchFamily="34" charset="-122"/>
-                <a:cs typeface="Plus Jakarta Sans" pitchFamily="34" charset="-120"/>
+                <a:latin typeface="Times New Roman" pitchFamily="34" charset="0"/>
+                <a:ea typeface="Times New Roman" pitchFamily="34" charset="-122"/>
+                <a:cs typeface="Times New Roman" pitchFamily="34" charset="-120"/>
               </a:rPr>
               <a:t>• Zod schema payload validation</a:t>
             </a:r>
@@ -5558,9 +5558,9 @@
                 <a:solidFill>
                   <a:srgbClr val="261E38"/>
                 </a:solidFill>
-                <a:latin typeface="Plus Jakarta Sans" pitchFamily="34" charset="0"/>
-                <a:ea typeface="Plus Jakarta Sans" pitchFamily="34" charset="-122"/>
-                <a:cs typeface="Plus Jakarta Sans" pitchFamily="34" charset="-120"/>
+                <a:latin typeface="Times New Roman" pitchFamily="34" charset="0"/>
+                <a:ea typeface="Times New Roman" pitchFamily="34" charset="-122"/>
+                <a:cs typeface="Times New Roman" pitchFamily="34" charset="-120"/>
               </a:rPr>
               <a:t>• Standard { success, data, error } envelopes</a:t>
             </a:r>
@@ -5600,9 +5600,9 @@
                 <a:solidFill>
                   <a:srgbClr val="261E38"/>
                 </a:solidFill>
-                <a:latin typeface="Plus Jakarta Sans" pitchFamily="34" charset="0"/>
-                <a:ea typeface="Plus Jakarta Sans" pitchFamily="34" charset="-122"/>
-                <a:cs typeface="Plus Jakarta Sans" pitchFamily="34" charset="-120"/>
+                <a:latin typeface="Times New Roman" pitchFamily="34" charset="0"/>
+                <a:ea typeface="Times New Roman" pitchFamily="34" charset="-122"/>
+                <a:cs typeface="Times New Roman" pitchFamily="34" charset="-120"/>
               </a:rPr>
               <a:t>• Supabase Auth session verification</a:t>
             </a:r>
@@ -5642,9 +5642,9 @@
                 <a:solidFill>
                   <a:srgbClr val="261E38"/>
                 </a:solidFill>
-                <a:latin typeface="Plus Jakarta Sans" pitchFamily="34" charset="0"/>
-                <a:ea typeface="Plus Jakarta Sans" pitchFamily="34" charset="-122"/>
-                <a:cs typeface="Plus Jakarta Sans" pitchFamily="34" charset="-120"/>
+                <a:latin typeface="Times New Roman" pitchFamily="34" charset="0"/>
+                <a:ea typeface="Times New Roman" pitchFamily="34" charset="-122"/>
+                <a:cs typeface="Times New Roman" pitchFamily="34" charset="-120"/>
               </a:rPr>
               <a:t>• Bilingual AI Triage processing</a:t>
             </a:r>
@@ -5731,9 +5731,9 @@
                 <a:solidFill>
                   <a:srgbClr val="0369A1"/>
                 </a:solidFill>
-                <a:latin typeface="Plus Jakarta Sans" pitchFamily="34" charset="0"/>
-                <a:ea typeface="Plus Jakarta Sans" pitchFamily="34" charset="-122"/>
-                <a:cs typeface="Plus Jakarta Sans" pitchFamily="34" charset="-120"/>
+                <a:latin typeface="Times New Roman" pitchFamily="34" charset="0"/>
+                <a:ea typeface="Times New Roman" pitchFamily="34" charset="-122"/>
+                <a:cs typeface="Times New Roman" pitchFamily="34" charset="-120"/>
               </a:rPr>
               <a:t>TIER 3</a:t>
             </a:r>
@@ -5770,9 +5770,9 @@
                 <a:solidFill>
                   <a:srgbClr val="261E38"/>
                 </a:solidFill>
-                <a:latin typeface="Outfit" pitchFamily="34" charset="0"/>
-                <a:ea typeface="Outfit" pitchFamily="34" charset="-122"/>
-                <a:cs typeface="Outfit" pitchFamily="34" charset="-120"/>
+                <a:latin typeface="Times New Roman" pitchFamily="34" charset="0"/>
+                <a:ea typeface="Times New Roman" pitchFamily="34" charset="-122"/>
+                <a:cs typeface="Times New Roman" pitchFamily="34" charset="-120"/>
               </a:rPr>
               <a:t>Cloud Persistence &amp; Auth</a:t>
             </a:r>
@@ -5809,9 +5809,9 @@
                 <a:solidFill>
                   <a:srgbClr val="7C3AED"/>
                 </a:solidFill>
-                <a:latin typeface="Plus Jakarta Sans" pitchFamily="34" charset="0"/>
-                <a:ea typeface="Plus Jakarta Sans" pitchFamily="34" charset="-122"/>
-                <a:cs typeface="Plus Jakarta Sans" pitchFamily="34" charset="-120"/>
+                <a:latin typeface="Times New Roman" pitchFamily="34" charset="0"/>
+                <a:ea typeface="Times New Roman" pitchFamily="34" charset="-122"/>
+                <a:cs typeface="Times New Roman" pitchFamily="34" charset="-120"/>
               </a:rPr>
               <a:t>Prisma 7 + PostgreSQL</a:t>
             </a:r>
@@ -5851,9 +5851,9 @@
                 <a:solidFill>
                   <a:srgbClr val="5F5377"/>
                 </a:solidFill>
-                <a:latin typeface="Plus Jakarta Sans" pitchFamily="34" charset="0"/>
-                <a:ea typeface="Plus Jakarta Sans" pitchFamily="34" charset="-122"/>
-                <a:cs typeface="Plus Jakarta Sans" pitchFamily="34" charset="-120"/>
+                <a:latin typeface="Times New Roman" pitchFamily="34" charset="0"/>
+                <a:ea typeface="Times New Roman" pitchFamily="34" charset="-122"/>
+                <a:cs typeface="Times New Roman" pitchFamily="34" charset="-120"/>
               </a:rPr>
               <a:t>Cloud database hosted on Supabase with 18 synchronized data models, Transaction/Session poolers, and secure JWT auth engine.</a:t>
             </a:r>
@@ -5913,9 +5913,9 @@
                 <a:solidFill>
                   <a:srgbClr val="9589B0"/>
                 </a:solidFill>
-                <a:latin typeface="Plus Jakarta Sans" pitchFamily="34" charset="0"/>
-                <a:ea typeface="Plus Jakarta Sans" pitchFamily="34" charset="-122"/>
-                <a:cs typeface="Plus Jakarta Sans" pitchFamily="34" charset="-120"/>
+                <a:latin typeface="Times New Roman" pitchFamily="34" charset="0"/>
+                <a:ea typeface="Times New Roman" pitchFamily="34" charset="-122"/>
+                <a:cs typeface="Times New Roman" pitchFamily="34" charset="-120"/>
               </a:rPr>
               <a:t>CORE CAPABILITIES:</a:t>
             </a:r>
@@ -5955,9 +5955,9 @@
                 <a:solidFill>
                   <a:srgbClr val="261E38"/>
                 </a:solidFill>
-                <a:latin typeface="Plus Jakarta Sans" pitchFamily="34" charset="0"/>
-                <a:ea typeface="Plus Jakarta Sans" pitchFamily="34" charset="-122"/>
-                <a:cs typeface="Plus Jakarta Sans" pitchFamily="34" charset="-120"/>
+                <a:latin typeface="Times New Roman" pitchFamily="34" charset="0"/>
+                <a:ea typeface="Times New Roman" pitchFamily="34" charset="-122"/>
+                <a:cs typeface="Times New Roman" pitchFamily="34" charset="-120"/>
               </a:rPr>
               <a:t>• 18 relational schema models</a:t>
             </a:r>
@@ -5997,9 +5997,9 @@
                 <a:solidFill>
                   <a:srgbClr val="261E38"/>
                 </a:solidFill>
-                <a:latin typeface="Plus Jakarta Sans" pitchFamily="34" charset="0"/>
-                <a:ea typeface="Plus Jakarta Sans" pitchFamily="34" charset="-122"/>
-                <a:cs typeface="Plus Jakarta Sans" pitchFamily="34" charset="-120"/>
+                <a:latin typeface="Times New Roman" pitchFamily="34" charset="0"/>
+                <a:ea typeface="Times New Roman" pitchFamily="34" charset="-122"/>
+                <a:cs typeface="Times New Roman" pitchFamily="34" charset="-120"/>
               </a:rPr>
               <a:t>• Supabase Transaction Pooler (Port 6543)</a:t>
             </a:r>
@@ -6039,9 +6039,9 @@
                 <a:solidFill>
                   <a:srgbClr val="261E38"/>
                 </a:solidFill>
-                <a:latin typeface="Plus Jakarta Sans" pitchFamily="34" charset="0"/>
-                <a:ea typeface="Plus Jakarta Sans" pitchFamily="34" charset="-122"/>
-                <a:cs typeface="Plus Jakarta Sans" pitchFamily="34" charset="-120"/>
+                <a:latin typeface="Times New Roman" pitchFamily="34" charset="0"/>
+                <a:ea typeface="Times New Roman" pitchFamily="34" charset="-122"/>
+                <a:cs typeface="Times New Roman" pitchFamily="34" charset="-120"/>
               </a:rPr>
               <a:t>• Session Pooler for migrations (Port 5432)</a:t>
             </a:r>
@@ -6081,9 +6081,9 @@
                 <a:solidFill>
                   <a:srgbClr val="261E38"/>
                 </a:solidFill>
-                <a:latin typeface="Plus Jakarta Sans" pitchFamily="34" charset="0"/>
-                <a:ea typeface="Plus Jakarta Sans" pitchFamily="34" charset="-122"/>
-                <a:cs typeface="Plus Jakarta Sans" pitchFamily="34" charset="-120"/>
+                <a:latin typeface="Times New Roman" pitchFamily="34" charset="0"/>
+                <a:ea typeface="Times New Roman" pitchFamily="34" charset="-122"/>
+                <a:cs typeface="Times New Roman" pitchFamily="34" charset="-120"/>
               </a:rPr>
               <a:t>• PostgreSQL Row Level Security (RLS)</a:t>
             </a:r>
@@ -6177,9 +6177,9 @@
                 <a:solidFill>
                   <a:srgbClr val="7C3AED"/>
                 </a:solidFill>
-                <a:latin typeface="Outfit" pitchFamily="34" charset="0"/>
-                <a:ea typeface="Outfit" pitchFamily="34" charset="-122"/>
-                <a:cs typeface="Outfit" pitchFamily="34" charset="-120"/>
+                <a:latin typeface="Times New Roman" pitchFamily="34" charset="0"/>
+                <a:ea typeface="Times New Roman" pitchFamily="34" charset="-122"/>
+                <a:cs typeface="Times New Roman" pitchFamily="34" charset="-120"/>
               </a:rPr>
               <a:t>🐾 Nuzzle Engine</a:t>
             </a:r>
@@ -6216,9 +6216,9 @@
                 <a:solidFill>
                   <a:srgbClr val="5F5377"/>
                 </a:solidFill>
-                <a:latin typeface="Plus Jakarta Sans" pitchFamily="34" charset="0"/>
-                <a:ea typeface="Plus Jakarta Sans" pitchFamily="34" charset="-122"/>
-                <a:cs typeface="Plus Jakarta Sans" pitchFamily="34" charset="-120"/>
+                <a:latin typeface="Times New Roman" pitchFamily="34" charset="0"/>
+                <a:ea typeface="Times New Roman" pitchFamily="34" charset="-122"/>
+                <a:cs typeface="Times New Roman" pitchFamily="34" charset="-120"/>
               </a:rPr>
               <a:t>Slide 3 / 10 • Full-Stack REST API Architecture</a:t>
             </a:r>
@@ -6255,9 +6255,9 @@
                 <a:solidFill>
                   <a:srgbClr val="7C3AED"/>
                 </a:solidFill>
-                <a:latin typeface="Plus Jakarta Sans" pitchFamily="34" charset="0"/>
-                <a:ea typeface="Plus Jakarta Sans" pitchFamily="34" charset="-122"/>
-                <a:cs typeface="Plus Jakarta Sans" pitchFamily="34" charset="-120"/>
+                <a:latin typeface="Times New Roman" pitchFamily="34" charset="0"/>
+                <a:ea typeface="Times New Roman" pitchFamily="34" charset="-122"/>
+                <a:cs typeface="Times New Roman" pitchFamily="34" charset="-120"/>
               </a:rPr>
               <a:t>SECURITY &amp; IDENTITY LAYER</a:t>
             </a:r>
@@ -6294,9 +6294,9 @@
                 <a:solidFill>
                   <a:srgbClr val="261E38"/>
                 </a:solidFill>
-                <a:latin typeface="Outfit" pitchFamily="34" charset="0"/>
-                <a:ea typeface="Outfit" pitchFamily="34" charset="-122"/>
-                <a:cs typeface="Outfit" pitchFamily="34" charset="-120"/>
+                <a:latin typeface="Times New Roman" pitchFamily="34" charset="0"/>
+                <a:ea typeface="Times New Roman" pitchFamily="34" charset="-122"/>
+                <a:cs typeface="Times New Roman" pitchFamily="34" charset="-120"/>
               </a:rPr>
               <a:t>Multi-Role Authentication &amp; Supabase JWT Lifecycle</a:t>
             </a:r>
@@ -6356,9 +6356,9 @@
                 <a:solidFill>
                   <a:srgbClr val="9589B0"/>
                 </a:solidFill>
-                <a:latin typeface="Plus Jakarta Sans" pitchFamily="34" charset="0"/>
-                <a:ea typeface="Plus Jakarta Sans" pitchFamily="34" charset="-122"/>
-                <a:cs typeface="Plus Jakarta Sans" pitchFamily="34" charset="-120"/>
+                <a:latin typeface="Times New Roman" pitchFamily="34" charset="0"/>
+                <a:ea typeface="Times New Roman" pitchFamily="34" charset="-122"/>
+                <a:cs typeface="Times New Roman" pitchFamily="34" charset="-120"/>
               </a:rPr>
               <a:t>Nuzzle API v2.0 • Abu Zafor, Nadim Rahman, Rizvi Sarker • Technopreneurship 2026</a:t>
             </a:r>
@@ -6420,9 +6420,9 @@
                 <a:solidFill>
                   <a:srgbClr val="7C3AED"/>
                 </a:solidFill>
-                <a:latin typeface="Plus Jakarta Sans" pitchFamily="34" charset="0"/>
-                <a:ea typeface="Plus Jakarta Sans" pitchFamily="34" charset="-122"/>
-                <a:cs typeface="Plus Jakarta Sans" pitchFamily="34" charset="-120"/>
+                <a:latin typeface="Times New Roman" pitchFamily="34" charset="0"/>
+                <a:ea typeface="Times New Roman" pitchFamily="34" charset="-122"/>
+                <a:cs typeface="Times New Roman" pitchFamily="34" charset="-120"/>
               </a:rPr>
               <a:t>3-ROLE HIERARCHY &amp; PERMISSIONS</a:t>
             </a:r>
@@ -6484,9 +6484,9 @@
                 <a:solidFill>
                   <a:srgbClr val="261E38"/>
                 </a:solidFill>
-                <a:latin typeface="Outfit" pitchFamily="34" charset="0"/>
-                <a:ea typeface="Outfit" pitchFamily="34" charset="-122"/>
-                <a:cs typeface="Outfit" pitchFamily="34" charset="-120"/>
+                <a:latin typeface="Times New Roman" pitchFamily="34" charset="0"/>
+                <a:ea typeface="Times New Roman" pitchFamily="34" charset="-122"/>
+                <a:cs typeface="Times New Roman" pitchFamily="34" charset="-120"/>
               </a:rPr>
               <a:t>🐾 Pet Parent</a:t>
             </a:r>
@@ -6523,9 +6523,9 @@
                 <a:solidFill>
                   <a:srgbClr val="5F5377"/>
                 </a:solidFill>
-                <a:latin typeface="Plus Jakarta Sans" pitchFamily="34" charset="0"/>
-                <a:ea typeface="Plus Jakarta Sans" pitchFamily="34" charset="-122"/>
-                <a:cs typeface="Plus Jakarta Sans" pitchFamily="34" charset="-120"/>
+                <a:latin typeface="Times New Roman" pitchFamily="34" charset="0"/>
+                <a:ea typeface="Times New Roman" pitchFamily="34" charset="-122"/>
+                <a:cs typeface="Times New Roman" pitchFamily="34" charset="-120"/>
               </a:rPr>
               <a:t>Guardian Passports, Den Feed, Lost Pet Alerts, Vet Booking</a:t>
             </a:r>
@@ -6587,9 +6587,9 @@
                 <a:solidFill>
                   <a:srgbClr val="261E38"/>
                 </a:solidFill>
-                <a:latin typeface="Outfit" pitchFamily="34" charset="0"/>
-                <a:ea typeface="Outfit" pitchFamily="34" charset="-122"/>
-                <a:cs typeface="Outfit" pitchFamily="34" charset="-120"/>
+                <a:latin typeface="Times New Roman" pitchFamily="34" charset="0"/>
+                <a:ea typeface="Times New Roman" pitchFamily="34" charset="-122"/>
+                <a:cs typeface="Times New Roman" pitchFamily="34" charset="-120"/>
               </a:rPr>
               <a:t>🛍️ Verified Pet Store</a:t>
             </a:r>
@@ -6626,9 +6626,9 @@
                 <a:solidFill>
                   <a:srgbClr val="5F5377"/>
                 </a:solidFill>
-                <a:latin typeface="Plus Jakarta Sans" pitchFamily="34" charset="0"/>
-                <a:ea typeface="Plus Jakarta Sans" pitchFamily="34" charset="-122"/>
-                <a:cs typeface="Plus Jakarta Sans" pitchFamily="34" charset="-120"/>
+                <a:latin typeface="Times New Roman" pitchFamily="34" charset="0"/>
+                <a:ea typeface="Times New Roman" pitchFamily="34" charset="-122"/>
+                <a:cs typeface="Times New Roman" pitchFamily="34" charset="-120"/>
               </a:rPr>
               <a:t>Boutique Catalog, Order Management, Gold Shield Badge</a:t>
             </a:r>
@@ -6690,9 +6690,9 @@
                 <a:solidFill>
                   <a:srgbClr val="261E38"/>
                 </a:solidFill>
-                <a:latin typeface="Outfit" pitchFamily="34" charset="0"/>
-                <a:ea typeface="Outfit" pitchFamily="34" charset="-122"/>
-                <a:cs typeface="Outfit" pitchFamily="34" charset="-120"/>
+                <a:latin typeface="Times New Roman" pitchFamily="34" charset="0"/>
+                <a:ea typeface="Times New Roman" pitchFamily="34" charset="-122"/>
+                <a:cs typeface="Times New Roman" pitchFamily="34" charset="-120"/>
               </a:rPr>
               <a:t>🏥 Vet Clinic / Hospital</a:t>
             </a:r>
@@ -6729,9 +6729,9 @@
                 <a:solidFill>
                   <a:srgbClr val="5F5377"/>
                 </a:solidFill>
-                <a:latin typeface="Plus Jakarta Sans" pitchFamily="34" charset="0"/>
-                <a:ea typeface="Plus Jakarta Sans" pitchFamily="34" charset="-122"/>
-                <a:cs typeface="Plus Jakarta Sans" pitchFamily="34" charset="-120"/>
+                <a:latin typeface="Times New Roman" pitchFamily="34" charset="0"/>
+                <a:ea typeface="Times New Roman" pitchFamily="34" charset="-122"/>
+                <a:cs typeface="Times New Roman" pitchFamily="34" charset="-120"/>
               </a:rPr>
               <a:t>Telemedicine Slot Management, PawDoctor Triage Partner</a:t>
             </a:r>
@@ -6771,9 +6771,9 @@
                 <a:solidFill>
                   <a:srgbClr val="5F5377"/>
                 </a:solidFill>
-                <a:latin typeface="Plus Jakarta Sans" pitchFamily="34" charset="0"/>
-                <a:ea typeface="Plus Jakarta Sans" pitchFamily="34" charset="-122"/>
-                <a:cs typeface="Plus Jakarta Sans" pitchFamily="34" charset="-120"/>
+                <a:latin typeface="Times New Roman" pitchFamily="34" charset="0"/>
+                <a:ea typeface="Times New Roman" pitchFamily="34" charset="-122"/>
+                <a:cs typeface="Times New Roman" pitchFamily="34" charset="-120"/>
               </a:rPr>
               <a:t>Session Token Protocol: Bearer JWT stored in localStorage and automatically forwarded via apiClient.ts Request Interceptors with 401 token refresh.</a:t>
             </a:r>
@@ -6835,9 +6835,9 @@
                 <a:solidFill>
                   <a:srgbClr val="947DEE"/>
                 </a:solidFill>
-                <a:latin typeface="Plus Jakarta Sans" pitchFamily="34" charset="0"/>
-                <a:ea typeface="Plus Jakarta Sans" pitchFamily="34" charset="-122"/>
-                <a:cs typeface="Plus Jakarta Sans" pitchFamily="34" charset="-120"/>
+                <a:latin typeface="Times New Roman" pitchFamily="34" charset="0"/>
+                <a:ea typeface="Times New Roman" pitchFamily="34" charset="-122"/>
+                <a:cs typeface="Times New Roman" pitchFamily="34" charset="-120"/>
               </a:rPr>
               <a:t>AUTHENTICATION REST HANDLERS</a:t>
             </a:r>
@@ -6899,9 +6899,9 @@
                 <a:solidFill>
                   <a:srgbClr val="10B981"/>
                 </a:solidFill>
-                <a:latin typeface="Outfit" pitchFamily="34" charset="0"/>
-                <a:ea typeface="Outfit" pitchFamily="34" charset="-122"/>
-                <a:cs typeface="Outfit" pitchFamily="34" charset="-120"/>
+                <a:latin typeface="Times New Roman" pitchFamily="34" charset="0"/>
+                <a:ea typeface="Times New Roman" pitchFamily="34" charset="-122"/>
+                <a:cs typeface="Times New Roman" pitchFamily="34" charset="-120"/>
               </a:rPr>
               <a:t>POST</a:t>
             </a:r>
@@ -6980,9 +6980,9 @@
                 <a:solidFill>
                   <a:srgbClr val="9589B0"/>
                 </a:solidFill>
-                <a:latin typeface="Plus Jakarta Sans" pitchFamily="34" charset="0"/>
-                <a:ea typeface="Plus Jakarta Sans" pitchFamily="34" charset="-122"/>
-                <a:cs typeface="Plus Jakarta Sans" pitchFamily="34" charset="-120"/>
+                <a:latin typeface="Times New Roman" pitchFamily="34" charset="0"/>
+                <a:ea typeface="Times New Roman" pitchFamily="34" charset="-122"/>
+                <a:cs typeface="Times New Roman" pitchFamily="34" charset="-120"/>
               </a:rPr>
               <a:t>Registers in Supabase Auth &amp; creates linked PostgreSQL Owner</a:t>
             </a:r>
@@ -7044,9 +7044,9 @@
                 <a:solidFill>
                   <a:srgbClr val="10B981"/>
                 </a:solidFill>
-                <a:latin typeface="Outfit" pitchFamily="34" charset="0"/>
-                <a:ea typeface="Outfit" pitchFamily="34" charset="-122"/>
-                <a:cs typeface="Outfit" pitchFamily="34" charset="-120"/>
+                <a:latin typeface="Times New Roman" pitchFamily="34" charset="0"/>
+                <a:ea typeface="Times New Roman" pitchFamily="34" charset="-122"/>
+                <a:cs typeface="Times New Roman" pitchFamily="34" charset="-120"/>
               </a:rPr>
               <a:t>POST</a:t>
             </a:r>
@@ -7125,9 +7125,9 @@
                 <a:solidFill>
                   <a:srgbClr val="9589B0"/>
                 </a:solidFill>
-                <a:latin typeface="Plus Jakarta Sans" pitchFamily="34" charset="0"/>
-                <a:ea typeface="Plus Jakarta Sans" pitchFamily="34" charset="-122"/>
-                <a:cs typeface="Plus Jakarta Sans" pitchFamily="34" charset="-120"/>
+                <a:latin typeface="Times New Roman" pitchFamily="34" charset="0"/>
+                <a:ea typeface="Times New Roman" pitchFamily="34" charset="-122"/>
+                <a:cs typeface="Times New Roman" pitchFamily="34" charset="-120"/>
               </a:rPr>
               <a:t>Verifies credentials via Supabase with fallback role switch</a:t>
             </a:r>
@@ -7189,9 +7189,9 @@
                 <a:solidFill>
                   <a:srgbClr val="10B981"/>
                 </a:solidFill>
-                <a:latin typeface="Outfit" pitchFamily="34" charset="0"/>
-                <a:ea typeface="Outfit" pitchFamily="34" charset="-122"/>
-                <a:cs typeface="Outfit" pitchFamily="34" charset="-120"/>
+                <a:latin typeface="Times New Roman" pitchFamily="34" charset="0"/>
+                <a:ea typeface="Times New Roman" pitchFamily="34" charset="-122"/>
+                <a:cs typeface="Times New Roman" pitchFamily="34" charset="-120"/>
               </a:rPr>
               <a:t>GET</a:t>
             </a:r>
@@ -7270,9 +7270,9 @@
                 <a:solidFill>
                   <a:srgbClr val="9589B0"/>
                 </a:solidFill>
-                <a:latin typeface="Plus Jakarta Sans" pitchFamily="34" charset="0"/>
-                <a:ea typeface="Plus Jakarta Sans" pitchFamily="34" charset="-122"/>
-                <a:cs typeface="Plus Jakarta Sans" pitchFamily="34" charset="-120"/>
+                <a:latin typeface="Times New Roman" pitchFamily="34" charset="0"/>
+                <a:ea typeface="Times New Roman" pitchFamily="34" charset="-122"/>
+                <a:cs typeface="Times New Roman" pitchFamily="34" charset="-120"/>
               </a:rPr>
               <a:t>Validates Bearer token &amp; returns Owner with pet passports</a:t>
             </a:r>
@@ -7366,9 +7366,9 @@
                 <a:solidFill>
                   <a:srgbClr val="7C3AED"/>
                 </a:solidFill>
-                <a:latin typeface="Outfit" pitchFamily="34" charset="0"/>
-                <a:ea typeface="Outfit" pitchFamily="34" charset="-122"/>
-                <a:cs typeface="Outfit" pitchFamily="34" charset="-120"/>
+                <a:latin typeface="Times New Roman" pitchFamily="34" charset="0"/>
+                <a:ea typeface="Times New Roman" pitchFamily="34" charset="-122"/>
+                <a:cs typeface="Times New Roman" pitchFamily="34" charset="-120"/>
               </a:rPr>
               <a:t>🐾 Nuzzle Engine</a:t>
             </a:r>
@@ -7405,9 +7405,9 @@
                 <a:solidFill>
                   <a:srgbClr val="5F5377"/>
                 </a:solidFill>
-                <a:latin typeface="Plus Jakarta Sans" pitchFamily="34" charset="0"/>
-                <a:ea typeface="Plus Jakarta Sans" pitchFamily="34" charset="-122"/>
-                <a:cs typeface="Plus Jakarta Sans" pitchFamily="34" charset="-120"/>
+                <a:latin typeface="Times New Roman" pitchFamily="34" charset="0"/>
+                <a:ea typeface="Times New Roman" pitchFamily="34" charset="-122"/>
+                <a:cs typeface="Times New Roman" pitchFamily="34" charset="-120"/>
               </a:rPr>
               <a:t>Slide 4 / 10 • Full-Stack REST API Architecture</a:t>
             </a:r>
@@ -7444,9 +7444,9 @@
                 <a:solidFill>
                   <a:srgbClr val="7C3AED"/>
                 </a:solidFill>
-                <a:latin typeface="Plus Jakarta Sans" pitchFamily="34" charset="0"/>
-                <a:ea typeface="Plus Jakarta Sans" pitchFamily="34" charset="-122"/>
-                <a:cs typeface="Plus Jakarta Sans" pitchFamily="34" charset="-120"/>
+                <a:latin typeface="Times New Roman" pitchFamily="34" charset="0"/>
+                <a:ea typeface="Times New Roman" pitchFamily="34" charset="-122"/>
+                <a:cs typeface="Times New Roman" pitchFamily="34" charset="-120"/>
               </a:rPr>
               <a:t>SOCIAL ENGAGEMENT ENGINE</a:t>
             </a:r>
@@ -7483,9 +7483,9 @@
                 <a:solidFill>
                   <a:srgbClr val="261E38"/>
                 </a:solidFill>
-                <a:latin typeface="Outfit" pitchFamily="34" charset="0"/>
-                <a:ea typeface="Outfit" pitchFamily="34" charset="-122"/>
-                <a:cs typeface="Outfit" pitchFamily="34" charset="-120"/>
+                <a:latin typeface="Times New Roman" pitchFamily="34" charset="0"/>
+                <a:ea typeface="Times New Roman" pitchFamily="34" charset="-122"/>
+                <a:cs typeface="Times New Roman" pitchFamily="34" charset="-120"/>
               </a:rPr>
               <a:t>Den Feed, Tactile Reactions &amp; 24h Stories API</a:t>
             </a:r>
@@ -7545,9 +7545,9 @@
                 <a:solidFill>
                   <a:srgbClr val="9589B0"/>
                 </a:solidFill>
-                <a:latin typeface="Plus Jakarta Sans" pitchFamily="34" charset="0"/>
-                <a:ea typeface="Plus Jakarta Sans" pitchFamily="34" charset="-122"/>
-                <a:cs typeface="Plus Jakarta Sans" pitchFamily="34" charset="-120"/>
+                <a:latin typeface="Times New Roman" pitchFamily="34" charset="0"/>
+                <a:ea typeface="Times New Roman" pitchFamily="34" charset="-122"/>
+                <a:cs typeface="Times New Roman" pitchFamily="34" charset="-120"/>
               </a:rPr>
               <a:t>Nuzzle API v2.0 • Abu Zafor, Nadim Rahman, Rizvi Sarker • Technopreneurship 2026</a:t>
             </a:r>
@@ -7609,9 +7609,9 @@
                 <a:solidFill>
                   <a:srgbClr val="7C3AED"/>
                 </a:solidFill>
-                <a:latin typeface="Plus Jakarta Sans" pitchFamily="34" charset="0"/>
-                <a:ea typeface="Plus Jakarta Sans" pitchFamily="34" charset="-122"/>
-                <a:cs typeface="Plus Jakarta Sans" pitchFamily="34" charset="-120"/>
+                <a:latin typeface="Times New Roman" pitchFamily="34" charset="0"/>
+                <a:ea typeface="Times New Roman" pitchFamily="34" charset="-122"/>
+                <a:cs typeface="Times New Roman" pitchFamily="34" charset="-120"/>
               </a:rPr>
               <a:t>CORE FEED &amp; MOMENTS CAPABILITIES</a:t>
             </a:r>
@@ -7673,9 +7673,9 @@
                 <a:solidFill>
                   <a:srgbClr val="261E38"/>
                 </a:solidFill>
-                <a:latin typeface="Outfit" pitchFamily="34" charset="0"/>
-                <a:ea typeface="Outfit" pitchFamily="34" charset="-122"/>
-                <a:cs typeface="Outfit" pitchFamily="34" charset="-120"/>
+                <a:latin typeface="Times New Roman" pitchFamily="34" charset="0"/>
+                <a:ea typeface="Times New Roman" pitchFamily="34" charset="-122"/>
+                <a:cs typeface="Times New Roman" pitchFamily="34" charset="-120"/>
               </a:rPr>
               <a:t>Paginated Den Feed</a:t>
             </a:r>
@@ -7712,9 +7712,9 @@
                 <a:solidFill>
                   <a:srgbClr val="5F5377"/>
                 </a:solidFill>
-                <a:latin typeface="Plus Jakarta Sans" pitchFamily="34" charset="0"/>
-                <a:ea typeface="Plus Jakarta Sans" pitchFamily="34" charset="-122"/>
-                <a:cs typeface="Plus Jakarta Sans" pitchFamily="34" charset="-120"/>
+                <a:latin typeface="Times New Roman" pitchFamily="34" charset="0"/>
+                <a:ea typeface="Times New Roman" pitchFamily="34" charset="-122"/>
+                <a:cs typeface="Times New Roman" pitchFamily="34" charset="-120"/>
               </a:rPr>
               <a:t>GET /api/posts supports category filtering, hashtag lookup, and cursor pagination.</a:t>
             </a:r>
@@ -7776,9 +7776,9 @@
                 <a:solidFill>
                   <a:srgbClr val="261E38"/>
                 </a:solidFill>
-                <a:latin typeface="Outfit" pitchFamily="34" charset="0"/>
-                <a:ea typeface="Outfit" pitchFamily="34" charset="-122"/>
-                <a:cs typeface="Outfit" pitchFamily="34" charset="-120"/>
+                <a:latin typeface="Times New Roman" pitchFamily="34" charset="0"/>
+                <a:ea typeface="Times New Roman" pitchFamily="34" charset="-122"/>
+                <a:cs typeface="Times New Roman" pitchFamily="34" charset="-120"/>
               </a:rPr>
               <a:t>5 Tactile Pet Reactions</a:t>
             </a:r>
@@ -7815,9 +7815,9 @@
                 <a:solidFill>
                   <a:srgbClr val="5F5377"/>
                 </a:solidFill>
-                <a:latin typeface="Plus Jakarta Sans" pitchFamily="34" charset="0"/>
-                <a:ea typeface="Plus Jakarta Sans" pitchFamily="34" charset="-122"/>
-                <a:cs typeface="Plus Jakarta Sans" pitchFamily="34" charset="-120"/>
+                <a:latin typeface="Times New Roman" pitchFamily="34" charset="0"/>
+                <a:ea typeface="Times New Roman" pitchFamily="34" charset="-122"/>
+                <a:cs typeface="Times New Roman" pitchFamily="34" charset="-120"/>
               </a:rPr>
               <a:t>POST /api/posts/:id/react toggles Paw 🐾, Nuzzle 💜, Treat 🦴, Ball 🎾, and Purr 😻.</a:t>
             </a:r>
@@ -7879,9 +7879,9 @@
                 <a:solidFill>
                   <a:srgbClr val="261E38"/>
                 </a:solidFill>
-                <a:latin typeface="Outfit" pitchFamily="34" charset="0"/>
-                <a:ea typeface="Outfit" pitchFamily="34" charset="-122"/>
-                <a:cs typeface="Outfit" pitchFamily="34" charset="-120"/>
+                <a:latin typeface="Times New Roman" pitchFamily="34" charset="0"/>
+                <a:ea typeface="Times New Roman" pitchFamily="34" charset="-122"/>
+                <a:cs typeface="Times New Roman" pitchFamily="34" charset="-120"/>
               </a:rPr>
               <a:t>Pet Persona Comments</a:t>
             </a:r>
@@ -7918,9 +7918,9 @@
                 <a:solidFill>
                   <a:srgbClr val="5F5377"/>
                 </a:solidFill>
-                <a:latin typeface="Plus Jakarta Sans" pitchFamily="34" charset="0"/>
-                <a:ea typeface="Plus Jakarta Sans" pitchFamily="34" charset="-122"/>
-                <a:cs typeface="Plus Jakarta Sans" pitchFamily="34" charset="-120"/>
+                <a:latin typeface="Times New Roman" pitchFamily="34" charset="0"/>
+                <a:ea typeface="Times New Roman" pitchFamily="34" charset="-122"/>
+                <a:cs typeface="Times New Roman" pitchFamily="34" charset="-120"/>
               </a:rPr>
               <a:t>POST /api/posts/:id/comments supports posting as either human parent or as the pet.</a:t>
             </a:r>
@@ -7982,9 +7982,9 @@
                 <a:solidFill>
                   <a:srgbClr val="261E38"/>
                 </a:solidFill>
-                <a:latin typeface="Outfit" pitchFamily="34" charset="0"/>
-                <a:ea typeface="Outfit" pitchFamily="34" charset="-122"/>
-                <a:cs typeface="Outfit" pitchFamily="34" charset="-120"/>
+                <a:latin typeface="Times New Roman" pitchFamily="34" charset="0"/>
+                <a:ea typeface="Times New Roman" pitchFamily="34" charset="-122"/>
+                <a:cs typeface="Times New Roman" pitchFamily="34" charset="-120"/>
               </a:rPr>
               <a:t>Snuggle Circles (24h Stories)</a:t>
             </a:r>
@@ -8021,9 +8021,9 @@
                 <a:solidFill>
                   <a:srgbClr val="5F5377"/>
                 </a:solidFill>
-                <a:latin typeface="Plus Jakarta Sans" pitchFamily="34" charset="0"/>
-                <a:ea typeface="Plus Jakarta Sans" pitchFamily="34" charset="-122"/>
-                <a:cs typeface="Plus Jakarta Sans" pitchFamily="34" charset="-120"/>
+                <a:latin typeface="Times New Roman" pitchFamily="34" charset="0"/>
+                <a:ea typeface="Times New Roman" pitchFamily="34" charset="-122"/>
+                <a:cs typeface="Times New Roman" pitchFamily="34" charset="-120"/>
               </a:rPr>
               <a:t>GET /api/stories fetches ephemeral active video/photo segments created in last 24 hours.</a:t>
             </a:r>
@@ -8085,9 +8085,9 @@
                 <a:solidFill>
                   <a:srgbClr val="7C3AED"/>
                 </a:solidFill>
-                <a:latin typeface="Plus Jakarta Sans" pitchFamily="34" charset="0"/>
-                <a:ea typeface="Plus Jakarta Sans" pitchFamily="34" charset="-122"/>
-                <a:cs typeface="Plus Jakarta Sans" pitchFamily="34" charset="-120"/>
+                <a:latin typeface="Times New Roman" pitchFamily="34" charset="0"/>
+                <a:ea typeface="Times New Roman" pitchFamily="34" charset="-122"/>
+                <a:cs typeface="Times New Roman" pitchFamily="34" charset="-120"/>
               </a:rPr>
               <a:t>5 TACTILE PET REACTIONS</a:t>
             </a:r>
@@ -8185,9 +8185,9 @@
                 <a:solidFill>
                   <a:srgbClr val="261E38"/>
                 </a:solidFill>
-                <a:latin typeface="Outfit" pitchFamily="34" charset="0"/>
-                <a:ea typeface="Outfit" pitchFamily="34" charset="-122"/>
-                <a:cs typeface="Outfit" pitchFamily="34" charset="-120"/>
+                <a:latin typeface="Times New Roman" pitchFamily="34" charset="0"/>
+                <a:ea typeface="Times New Roman" pitchFamily="34" charset="-122"/>
+                <a:cs typeface="Times New Roman" pitchFamily="34" charset="-120"/>
               </a:rPr>
               <a:t>Paw Print</a:t>
             </a:r>
@@ -8224,9 +8224,9 @@
                 <a:solidFill>
                   <a:srgbClr val="5F5377"/>
                 </a:solidFill>
-                <a:latin typeface="Plus Jakarta Sans" pitchFamily="34" charset="0"/>
-                <a:ea typeface="Plus Jakarta Sans" pitchFamily="34" charset="-122"/>
-                <a:cs typeface="Plus Jakarta Sans" pitchFamily="34" charset="-120"/>
+                <a:latin typeface="Times New Roman" pitchFamily="34" charset="0"/>
+                <a:ea typeface="Times New Roman" pitchFamily="34" charset="-122"/>
+                <a:cs typeface="Times New Roman" pitchFamily="34" charset="-120"/>
               </a:rPr>
               <a:t>Standard appreciation</a:t>
             </a:r>
@@ -8324,9 +8324,9 @@
                 <a:solidFill>
                   <a:srgbClr val="261E38"/>
                 </a:solidFill>
-                <a:latin typeface="Outfit" pitchFamily="34" charset="0"/>
-                <a:ea typeface="Outfit" pitchFamily="34" charset="-122"/>
-                <a:cs typeface="Outfit" pitchFamily="34" charset="-120"/>
+                <a:latin typeface="Times New Roman" pitchFamily="34" charset="0"/>
+                <a:ea typeface="Times New Roman" pitchFamily="34" charset="-122"/>
+                <a:cs typeface="Times New Roman" pitchFamily="34" charset="-120"/>
               </a:rPr>
               <a:t>Nuzzle</a:t>
             </a:r>
@@ -8363,9 +8363,9 @@
                 <a:solidFill>
                   <a:srgbClr val="5F5377"/>
                 </a:solidFill>
-                <a:latin typeface="Plus Jakarta Sans" pitchFamily="34" charset="0"/>
-                <a:ea typeface="Plus Jakarta Sans" pitchFamily="34" charset="-122"/>
-                <a:cs typeface="Plus Jakarta Sans" pitchFamily="34" charset="-120"/>
+                <a:latin typeface="Times New Roman" pitchFamily="34" charset="0"/>
+                <a:ea typeface="Times New Roman" pitchFamily="34" charset="-122"/>
+                <a:cs typeface="Times New Roman" pitchFamily="34" charset="-120"/>
               </a:rPr>
               <a:t>Deep affection &amp; snuggle</a:t>
             </a:r>
@@ -8463,9 +8463,9 @@
                 <a:solidFill>
                   <a:srgbClr val="261E38"/>
                 </a:solidFill>
-                <a:latin typeface="Outfit" pitchFamily="34" charset="0"/>
-                <a:ea typeface="Outfit" pitchFamily="34" charset="-122"/>
-                <a:cs typeface="Outfit" pitchFamily="34" charset="-120"/>
+                <a:latin typeface="Times New Roman" pitchFamily="34" charset="0"/>
+                <a:ea typeface="Times New Roman" pitchFamily="34" charset="-122"/>
+                <a:cs typeface="Times New Roman" pitchFamily="34" charset="-120"/>
               </a:rPr>
               <a:t>Tasty Treat</a:t>
             </a:r>
@@ -8502,9 +8502,9 @@
                 <a:solidFill>
                   <a:srgbClr val="5F5377"/>
                 </a:solidFill>
-                <a:latin typeface="Plus Jakarta Sans" pitchFamily="34" charset="0"/>
-                <a:ea typeface="Plus Jakarta Sans" pitchFamily="34" charset="-122"/>
-                <a:cs typeface="Plus Jakarta Sans" pitchFamily="34" charset="-120"/>
+                <a:latin typeface="Times New Roman" pitchFamily="34" charset="0"/>
+                <a:ea typeface="Times New Roman" pitchFamily="34" charset="-122"/>
+                <a:cs typeface="Times New Roman" pitchFamily="34" charset="-120"/>
               </a:rPr>
               <a:t>Reward for good behaviour</a:t>
             </a:r>
@@ -8602,9 +8602,9 @@
                 <a:solidFill>
                   <a:srgbClr val="261E38"/>
                 </a:solidFill>
-                <a:latin typeface="Outfit" pitchFamily="34" charset="0"/>
-                <a:ea typeface="Outfit" pitchFamily="34" charset="-122"/>
-                <a:cs typeface="Outfit" pitchFamily="34" charset="-120"/>
+                <a:latin typeface="Times New Roman" pitchFamily="34" charset="0"/>
+                <a:ea typeface="Times New Roman" pitchFamily="34" charset="-122"/>
+                <a:cs typeface="Times New Roman" pitchFamily="34" charset="-120"/>
               </a:rPr>
               <a:t>Tennis Ball</a:t>
             </a:r>
@@ -8641,9 +8641,9 @@
                 <a:solidFill>
                   <a:srgbClr val="5F5377"/>
                 </a:solidFill>
-                <a:latin typeface="Plus Jakarta Sans" pitchFamily="34" charset="0"/>
-                <a:ea typeface="Plus Jakarta Sans" pitchFamily="34" charset="-122"/>
-                <a:cs typeface="Plus Jakarta Sans" pitchFamily="34" charset="-120"/>
+                <a:latin typeface="Times New Roman" pitchFamily="34" charset="0"/>
+                <a:ea typeface="Times New Roman" pitchFamily="34" charset="-122"/>
+                <a:cs typeface="Times New Roman" pitchFamily="34" charset="-120"/>
               </a:rPr>
               <a:t>Playful energy &amp; zoomies</a:t>
             </a:r>
@@ -8741,9 +8741,9 @@
                 <a:solidFill>
                   <a:srgbClr val="261E38"/>
                 </a:solidFill>
-                <a:latin typeface="Outfit" pitchFamily="34" charset="0"/>
-                <a:ea typeface="Outfit" pitchFamily="34" charset="-122"/>
-                <a:cs typeface="Outfit" pitchFamily="34" charset="-120"/>
+                <a:latin typeface="Times New Roman" pitchFamily="34" charset="0"/>
+                <a:ea typeface="Times New Roman" pitchFamily="34" charset="-122"/>
+                <a:cs typeface="Times New Roman" pitchFamily="34" charset="-120"/>
               </a:rPr>
               <a:t>Heart Purr</a:t>
             </a:r>
@@ -8780,9 +8780,9 @@
                 <a:solidFill>
                   <a:srgbClr val="5F5377"/>
                 </a:solidFill>
-                <a:latin typeface="Plus Jakarta Sans" pitchFamily="34" charset="0"/>
-                <a:ea typeface="Plus Jakarta Sans" pitchFamily="34" charset="-122"/>
-                <a:cs typeface="Plus Jakarta Sans" pitchFamily="34" charset="-120"/>
+                <a:latin typeface="Times New Roman" pitchFamily="34" charset="0"/>
+                <a:ea typeface="Times New Roman" pitchFamily="34" charset="-122"/>
+                <a:cs typeface="Times New Roman" pitchFamily="34" charset="-120"/>
               </a:rPr>
               <a:t>Cat vocalization love</a:t>
             </a:r>
@@ -8876,9 +8876,9 @@
                 <a:solidFill>
                   <a:srgbClr val="7C3AED"/>
                 </a:solidFill>
-                <a:latin typeface="Outfit" pitchFamily="34" charset="0"/>
-                <a:ea typeface="Outfit" pitchFamily="34" charset="-122"/>
-                <a:cs typeface="Outfit" pitchFamily="34" charset="-120"/>
+                <a:latin typeface="Times New Roman" pitchFamily="34" charset="0"/>
+                <a:ea typeface="Times New Roman" pitchFamily="34" charset="-122"/>
+                <a:cs typeface="Times New Roman" pitchFamily="34" charset="-120"/>
               </a:rPr>
               <a:t>🐾 Nuzzle Engine</a:t>
             </a:r>
@@ -8915,9 +8915,9 @@
                 <a:solidFill>
                   <a:srgbClr val="5F5377"/>
                 </a:solidFill>
-                <a:latin typeface="Plus Jakarta Sans" pitchFamily="34" charset="0"/>
-                <a:ea typeface="Plus Jakarta Sans" pitchFamily="34" charset="-122"/>
-                <a:cs typeface="Plus Jakarta Sans" pitchFamily="34" charset="-120"/>
+                <a:latin typeface="Times New Roman" pitchFamily="34" charset="0"/>
+                <a:ea typeface="Times New Roman" pitchFamily="34" charset="-122"/>
+                <a:cs typeface="Times New Roman" pitchFamily="34" charset="-120"/>
               </a:rPr>
               <a:t>Slide 5 / 10 • Full-Stack REST API Architecture</a:t>
             </a:r>
@@ -8954,9 +8954,9 @@
                 <a:solidFill>
                   <a:srgbClr val="7C3AED"/>
                 </a:solidFill>
-                <a:latin typeface="Plus Jakarta Sans" pitchFamily="34" charset="0"/>
-                <a:ea typeface="Plus Jakarta Sans" pitchFamily="34" charset="-122"/>
-                <a:cs typeface="Plus Jakarta Sans" pitchFamily="34" charset="-120"/>
+                <a:latin typeface="Times New Roman" pitchFamily="34" charset="0"/>
+                <a:ea typeface="Times New Roman" pitchFamily="34" charset="-122"/>
+                <a:cs typeface="Times New Roman" pitchFamily="34" charset="-120"/>
               </a:rPr>
               <a:t>EMERGENCY RESCUE DISPATCH</a:t>
             </a:r>
@@ -8993,9 +8993,9 @@
                 <a:solidFill>
                   <a:srgbClr val="261E38"/>
                 </a:solidFill>
-                <a:latin typeface="Outfit" pitchFamily="34" charset="0"/>
-                <a:ea typeface="Outfit" pitchFamily="34" charset="-122"/>
-                <a:cs typeface="Outfit" pitchFamily="34" charset="-120"/>
+                <a:latin typeface="Times New Roman" pitchFamily="34" charset="0"/>
+                <a:ea typeface="Times New Roman" pitchFamily="34" charset="-122"/>
+                <a:cs typeface="Times New Roman" pitchFamily="34" charset="-120"/>
               </a:rPr>
               <a:t>5-Mile Radar Alert &amp; Volunteer Claim-and-Lock API</a:t>
             </a:r>
@@ -9055,9 +9055,9 @@
                 <a:solidFill>
                   <a:srgbClr val="9589B0"/>
                 </a:solidFill>
-                <a:latin typeface="Plus Jakarta Sans" pitchFamily="34" charset="0"/>
-                <a:ea typeface="Plus Jakarta Sans" pitchFamily="34" charset="-122"/>
-                <a:cs typeface="Plus Jakarta Sans" pitchFamily="34" charset="-120"/>
+                <a:latin typeface="Times New Roman" pitchFamily="34" charset="0"/>
+                <a:ea typeface="Times New Roman" pitchFamily="34" charset="-122"/>
+                <a:cs typeface="Times New Roman" pitchFamily="34" charset="-120"/>
               </a:rPr>
               <a:t>Nuzzle API v2.0 • Abu Zafor, Nadim Rahman, Rizvi Sarker • Technopreneurship 2026</a:t>
             </a:r>
@@ -9119,9 +9119,9 @@
                 <a:solidFill>
                   <a:srgbClr val="F43F5E"/>
                 </a:solidFill>
-                <a:latin typeface="Plus Jakarta Sans" pitchFamily="34" charset="0"/>
-                <a:ea typeface="Plus Jakarta Sans" pitchFamily="34" charset="-122"/>
-                <a:cs typeface="Plus Jakarta Sans" pitchFamily="34" charset="-120"/>
+                <a:latin typeface="Times New Roman" pitchFamily="34" charset="0"/>
+                <a:ea typeface="Times New Roman" pitchFamily="34" charset="-122"/>
+                <a:cs typeface="Times New Roman" pitchFamily="34" charset="-120"/>
               </a:rPr>
               <a:t>5-MILE GEOLOCATION RADAR</a:t>
             </a:r>
@@ -9161,9 +9161,9 @@
                 <a:solidFill>
                   <a:srgbClr val="5F5377"/>
                 </a:solidFill>
-                <a:latin typeface="Plus Jakarta Sans" pitchFamily="34" charset="0"/>
-                <a:ea typeface="Plus Jakarta Sans" pitchFamily="34" charset="-122"/>
-                <a:cs typeface="Plus Jakarta Sans" pitchFamily="34" charset="-120"/>
+                <a:latin typeface="Times New Roman" pitchFamily="34" charset="0"/>
+                <a:ea typeface="Times New Roman" pitchFamily="34" charset="-122"/>
+                <a:cs typeface="Times New Roman" pitchFamily="34" charset="-120"/>
               </a:rPr>
               <a:t>When a pet is reported lost, the Radar Engine broadcasts a high-priority push notification to all pet parents, verified stores, and clinics within a 5.0-mile radius.</a:t>
             </a:r>
@@ -9225,9 +9225,9 @@
                 <a:solidFill>
                   <a:srgbClr val="261E38"/>
                 </a:solidFill>
-                <a:latin typeface="Outfit" pitchFamily="34" charset="0"/>
-                <a:ea typeface="Outfit" pitchFamily="34" charset="-122"/>
-                <a:cs typeface="Outfit" pitchFamily="34" charset="-120"/>
+                <a:latin typeface="Times New Roman" pitchFamily="34" charset="0"/>
+                <a:ea typeface="Times New Roman" pitchFamily="34" charset="-122"/>
+                <a:cs typeface="Times New Roman" pitchFamily="34" charset="-120"/>
               </a:rPr>
               <a:t>🚨 Emergency Bounding Box</a:t>
             </a:r>
@@ -9267,9 +9267,9 @@
                 <a:solidFill>
                   <a:srgbClr val="5F5377"/>
                 </a:solidFill>
-                <a:latin typeface="Plus Jakarta Sans" pitchFamily="34" charset="0"/>
-                <a:ea typeface="Plus Jakarta Sans" pitchFamily="34" charset="-122"/>
-                <a:cs typeface="Plus Jakarta Sans" pitchFamily="34" charset="-120"/>
+                <a:latin typeface="Times New Roman" pitchFamily="34" charset="0"/>
+                <a:ea typeface="Times New Roman" pitchFamily="34" charset="-122"/>
+                <a:cs typeface="Times New Roman" pitchFamily="34" charset="-120"/>
               </a:rPr>
               <a:t>Queries PostgreSQL with lat/long distance math to return local alerts only.</a:t>
             </a:r>
@@ -9331,9 +9331,9 @@
                 <a:solidFill>
                   <a:srgbClr val="261E38"/>
                 </a:solidFill>
-                <a:latin typeface="Outfit" pitchFamily="34" charset="0"/>
-                <a:ea typeface="Outfit" pitchFamily="34" charset="-122"/>
-                <a:cs typeface="Outfit" pitchFamily="34" charset="-120"/>
+                <a:latin typeface="Times New Roman" pitchFamily="34" charset="0"/>
+                <a:ea typeface="Times New Roman" pitchFamily="34" charset="-122"/>
+                <a:cs typeface="Times New Roman" pitchFamily="34" charset="-120"/>
               </a:rPr>
               <a:t>🔒 Claim-and-Lock Rescue Protocol</a:t>
             </a:r>
@@ -9373,9 +9373,9 @@
                 <a:solidFill>
                   <a:srgbClr val="5F5377"/>
                 </a:solidFill>
-                <a:latin typeface="Plus Jakarta Sans" pitchFamily="34" charset="0"/>
-                <a:ea typeface="Plus Jakarta Sans" pitchFamily="34" charset="-122"/>
-                <a:cs typeface="Plus Jakarta Sans" pitchFamily="34" charset="-120"/>
+                <a:latin typeface="Times New Roman" pitchFamily="34" charset="0"/>
+                <a:ea typeface="Times New Roman" pitchFamily="34" charset="-122"/>
+                <a:cs typeface="Times New Roman" pitchFamily="34" charset="-120"/>
               </a:rPr>
               <a:t>POST /api/lost-found/:id/claim locks rescue case to 1 volunteer to prevent duplicate dispatches.</a:t>
             </a:r>
@@ -9437,9 +9437,9 @@
                 <a:solidFill>
                   <a:srgbClr val="261E38"/>
                 </a:solidFill>
-                <a:latin typeface="Outfit" pitchFamily="34" charset="0"/>
-                <a:ea typeface="Outfit" pitchFamily="34" charset="-122"/>
-                <a:cs typeface="Outfit" pitchFamily="34" charset="-120"/>
+                <a:latin typeface="Times New Roman" pitchFamily="34" charset="0"/>
+                <a:ea typeface="Times New Roman" pitchFamily="34" charset="-122"/>
+                <a:cs typeface="Times New Roman" pitchFamily="34" charset="-120"/>
               </a:rPr>
               <a:t>💰 Bounty &amp; Identification</a:t>
             </a:r>
@@ -9479,9 +9479,9 @@
                 <a:solidFill>
                   <a:srgbClr val="5F5377"/>
                 </a:solidFill>
-                <a:latin typeface="Plus Jakarta Sans" pitchFamily="34" charset="0"/>
-                <a:ea typeface="Plus Jakarta Sans" pitchFamily="34" charset="-122"/>
-                <a:cs typeface="Plus Jakarta Sans" pitchFamily="34" charset="-120"/>
+                <a:latin typeface="Times New Roman" pitchFamily="34" charset="0"/>
+                <a:ea typeface="Times New Roman" pitchFamily="34" charset="-122"/>
+                <a:cs typeface="Times New Roman" pitchFamily="34" charset="-120"/>
               </a:rPr>
               <a:t>Displays microchip ID, collar tags, distinctive markings, and optional rescue rewards.</a:t>
             </a:r>
@@ -9543,9 +9543,9 @@
                 <a:solidFill>
                   <a:srgbClr val="947DEE"/>
                 </a:solidFill>
-                <a:latin typeface="Plus Jakarta Sans" pitchFamily="34" charset="0"/>
-                <a:ea typeface="Plus Jakarta Sans" pitchFamily="34" charset="-122"/>
-                <a:cs typeface="Plus Jakarta Sans" pitchFamily="34" charset="-120"/>
+                <a:latin typeface="Times New Roman" pitchFamily="34" charset="0"/>
+                <a:ea typeface="Times New Roman" pitchFamily="34" charset="-122"/>
+                <a:cs typeface="Times New Roman" pitchFamily="34" charset="-120"/>
               </a:rPr>
               <a:t>RADAR ALERT PAYLOAD SCHEMA</a:t>
             </a:r>
@@ -9970,9 +9970,9 @@
                 <a:solidFill>
                   <a:srgbClr val="7C3AED"/>
                 </a:solidFill>
-                <a:latin typeface="Outfit" pitchFamily="34" charset="0"/>
-                <a:ea typeface="Outfit" pitchFamily="34" charset="-122"/>
-                <a:cs typeface="Outfit" pitchFamily="34" charset="-120"/>
+                <a:latin typeface="Times New Roman" pitchFamily="34" charset="0"/>
+                <a:ea typeface="Times New Roman" pitchFamily="34" charset="-122"/>
+                <a:cs typeface="Times New Roman" pitchFamily="34" charset="-120"/>
               </a:rPr>
               <a:t>🐾 Nuzzle Engine</a:t>
             </a:r>
@@ -10009,9 +10009,9 @@
                 <a:solidFill>
                   <a:srgbClr val="5F5377"/>
                 </a:solidFill>
-                <a:latin typeface="Plus Jakarta Sans" pitchFamily="34" charset="0"/>
-                <a:ea typeface="Plus Jakarta Sans" pitchFamily="34" charset="-122"/>
-                <a:cs typeface="Plus Jakarta Sans" pitchFamily="34" charset="-120"/>
+                <a:latin typeface="Times New Roman" pitchFamily="34" charset="0"/>
+                <a:ea typeface="Times New Roman" pitchFamily="34" charset="-122"/>
+                <a:cs typeface="Times New Roman" pitchFamily="34" charset="-120"/>
               </a:rPr>
               <a:t>Slide 6 / 10 • Full-Stack REST API Architecture</a:t>
             </a:r>
@@ -10048,9 +10048,9 @@
                 <a:solidFill>
                   <a:srgbClr val="7C3AED"/>
                 </a:solidFill>
-                <a:latin typeface="Plus Jakarta Sans" pitchFamily="34" charset="0"/>
-                <a:ea typeface="Plus Jakarta Sans" pitchFamily="34" charset="-122"/>
-                <a:cs typeface="Plus Jakarta Sans" pitchFamily="34" charset="-120"/>
+                <a:latin typeface="Times New Roman" pitchFamily="34" charset="0"/>
+                <a:ea typeface="Times New Roman" pitchFamily="34" charset="-122"/>
+                <a:cs typeface="Times New Roman" pitchFamily="34" charset="-120"/>
               </a:rPr>
               <a:t>TELEMEDICINE &amp; CLINICAL CARE</a:t>
             </a:r>
@@ -10087,9 +10087,9 @@
                 <a:solidFill>
                   <a:srgbClr val="261E38"/>
                 </a:solidFill>
-                <a:latin typeface="Outfit" pitchFamily="34" charset="0"/>
-                <a:ea typeface="Outfit" pitchFamily="34" charset="-122"/>
-                <a:cs typeface="Outfit" pitchFamily="34" charset="-120"/>
+                <a:latin typeface="Times New Roman" pitchFamily="34" charset="0"/>
+                <a:ea typeface="Times New Roman" pitchFamily="34" charset="-122"/>
+                <a:cs typeface="Times New Roman" pitchFamily="34" charset="-120"/>
               </a:rPr>
               <a:t>Veterinary Directory &amp; Appointment Scheduling API</a:t>
             </a:r>
@@ -10149,9 +10149,9 @@
                 <a:solidFill>
                   <a:srgbClr val="9589B0"/>
                 </a:solidFill>
-                <a:latin typeface="Plus Jakarta Sans" pitchFamily="34" charset="0"/>
-                <a:ea typeface="Plus Jakarta Sans" pitchFamily="34" charset="-122"/>
-                <a:cs typeface="Plus Jakarta Sans" pitchFamily="34" charset="-120"/>
+                <a:latin typeface="Times New Roman" pitchFamily="34" charset="0"/>
+                <a:ea typeface="Times New Roman" pitchFamily="34" charset="-122"/>
+                <a:cs typeface="Times New Roman" pitchFamily="34" charset="-120"/>
               </a:rPr>
               <a:t>Nuzzle API v2.0 • Abu Zafor, Nadim Rahman, Rizvi Sarker • Technopreneurship 2026</a:t>
             </a:r>
@@ -10213,9 +10213,9 @@
                 <a:solidFill>
                   <a:srgbClr val="261E38"/>
                 </a:solidFill>
-                <a:latin typeface="Outfit" pitchFamily="34" charset="0"/>
-                <a:ea typeface="Outfit" pitchFamily="34" charset="-122"/>
-                <a:cs typeface="Outfit" pitchFamily="34" charset="-120"/>
+                <a:latin typeface="Times New Roman" pitchFamily="34" charset="0"/>
+                <a:ea typeface="Times New Roman" pitchFamily="34" charset="-122"/>
+                <a:cs typeface="Times New Roman" pitchFamily="34" charset="-120"/>
               </a:rPr>
               <a:t>Verified Clinic Directory</a:t>
             </a:r>
@@ -10294,9 +10294,9 @@
                 <a:solidFill>
                   <a:srgbClr val="5F5377"/>
                 </a:solidFill>
-                <a:latin typeface="Plus Jakarta Sans" pitchFamily="34" charset="0"/>
-                <a:ea typeface="Plus Jakarta Sans" pitchFamily="34" charset="-122"/>
-                <a:cs typeface="Plus Jakarta Sans" pitchFamily="34" charset="-120"/>
+                <a:latin typeface="Times New Roman" pitchFamily="34" charset="0"/>
+                <a:ea typeface="Times New Roman" pitchFamily="34" charset="-122"/>
+                <a:cs typeface="Times New Roman" pitchFamily="34" charset="-120"/>
               </a:rPr>
               <a:t>Returns accredited veterinary hospitals in Dhaka with ratings, distance radius, and emergency badges.</a:t>
             </a:r>
@@ -10381,9 +10381,9 @@
                 <a:solidFill>
                   <a:srgbClr val="261E38"/>
                 </a:solidFill>
-                <a:latin typeface="Plus Jakarta Sans" pitchFamily="34" charset="0"/>
-                <a:ea typeface="Plus Jakarta Sans" pitchFamily="34" charset="-122"/>
-                <a:cs typeface="Plus Jakarta Sans" pitchFamily="34" charset="-120"/>
+                <a:latin typeface="Times New Roman" pitchFamily="34" charset="0"/>
+                <a:ea typeface="Times New Roman" pitchFamily="34" charset="-122"/>
+                <a:cs typeface="Times New Roman" pitchFamily="34" charset="-120"/>
               </a:rPr>
               <a:t>✓ Dr. Sarah Al-Mansoor (Cascade 24/7)</a:t>
             </a:r>
@@ -10445,9 +10445,9 @@
                 <a:solidFill>
                   <a:srgbClr val="261E38"/>
                 </a:solidFill>
-                <a:latin typeface="Plus Jakarta Sans" pitchFamily="34" charset="0"/>
-                <a:ea typeface="Plus Jakarta Sans" pitchFamily="34" charset="-122"/>
-                <a:cs typeface="Plus Jakarta Sans" pitchFamily="34" charset="-120"/>
+                <a:latin typeface="Times New Roman" pitchFamily="34" charset="0"/>
+                <a:ea typeface="Times New Roman" pitchFamily="34" charset="-122"/>
+                <a:cs typeface="Times New Roman" pitchFamily="34" charset="-120"/>
               </a:rPr>
               <a:t>✓ Dr. Marcus Lee (Bay Area Exotic)</a:t>
             </a:r>
@@ -10509,9 +10509,9 @@
                 <a:solidFill>
                   <a:srgbClr val="261E38"/>
                 </a:solidFill>
-                <a:latin typeface="Plus Jakarta Sans" pitchFamily="34" charset="0"/>
-                <a:ea typeface="Plus Jakarta Sans" pitchFamily="34" charset="-122"/>
-                <a:cs typeface="Plus Jakarta Sans" pitchFamily="34" charset="-120"/>
+                <a:latin typeface="Times New Roman" pitchFamily="34" charset="0"/>
+                <a:ea typeface="Times New Roman" pitchFamily="34" charset="-122"/>
+                <a:cs typeface="Times New Roman" pitchFamily="34" charset="-120"/>
               </a:rPr>
               <a:t>✓ Dr. Priya Nair (Sunnyvale Wellness)</a:t>
             </a:r>
@@ -10573,9 +10573,9 @@
                 <a:solidFill>
                   <a:srgbClr val="261E38"/>
                 </a:solidFill>
-                <a:latin typeface="Outfit" pitchFamily="34" charset="0"/>
-                <a:ea typeface="Outfit" pitchFamily="34" charset="-122"/>
-                <a:cs typeface="Outfit" pitchFamily="34" charset="-120"/>
+                <a:latin typeface="Times New Roman" pitchFamily="34" charset="0"/>
+                <a:ea typeface="Times New Roman" pitchFamily="34" charset="-122"/>
+                <a:cs typeface="Times New Roman" pitchFamily="34" charset="-120"/>
               </a:rPr>
               <a:t>Pro Priority Placement</a:t>
             </a:r>
@@ -10654,9 +10654,9 @@
                 <a:solidFill>
                   <a:srgbClr val="5F5377"/>
                 </a:solidFill>
-                <a:latin typeface="Plus Jakarta Sans" pitchFamily="34" charset="0"/>
-                <a:ea typeface="Plus Jakarta Sans" pitchFamily="34" charset="-122"/>
-                <a:cs typeface="Plus Jakarta Sans" pitchFamily="34" charset="-120"/>
+                <a:latin typeface="Times New Roman" pitchFamily="34" charset="0"/>
+                <a:ea typeface="Times New Roman" pitchFamily="34" charset="-122"/>
+                <a:cs typeface="Times New Roman" pitchFamily="34" charset="-120"/>
               </a:rPr>
               <a:t>Subscribed partner clinics receive guaranteed #1 priority placement in PawAI triage suggestions.</a:t>
             </a:r>
@@ -10741,9 +10741,9 @@
                 <a:solidFill>
                   <a:srgbClr val="261E38"/>
                 </a:solidFill>
-                <a:latin typeface="Plus Jakarta Sans" pitchFamily="34" charset="0"/>
-                <a:ea typeface="Plus Jakarta Sans" pitchFamily="34" charset="-122"/>
-                <a:cs typeface="Plus Jakarta Sans" pitchFamily="34" charset="-120"/>
+                <a:latin typeface="Times New Roman" pitchFamily="34" charset="0"/>
+                <a:ea typeface="Times New Roman" pitchFamily="34" charset="-122"/>
+                <a:cs typeface="Times New Roman" pitchFamily="34" charset="-120"/>
               </a:rPr>
               <a:t>✓ Gold Clinic Shield Badge</a:t>
             </a:r>
@@ -10805,9 +10805,9 @@
                 <a:solidFill>
                   <a:srgbClr val="261E38"/>
                 </a:solidFill>
-                <a:latin typeface="Plus Jakarta Sans" pitchFamily="34" charset="0"/>
-                <a:ea typeface="Plus Jakarta Sans" pitchFamily="34" charset="-122"/>
-                <a:cs typeface="Plus Jakarta Sans" pitchFamily="34" charset="-120"/>
+                <a:latin typeface="Times New Roman" pitchFamily="34" charset="0"/>
+                <a:ea typeface="Times New Roman" pitchFamily="34" charset="-122"/>
+                <a:cs typeface="Times New Roman" pitchFamily="34" charset="-120"/>
               </a:rPr>
               <a:t>✓ Instant Triage Log Handoff</a:t>
             </a:r>
@@ -10869,9 +10869,9 @@
                 <a:solidFill>
                   <a:srgbClr val="261E38"/>
                 </a:solidFill>
-                <a:latin typeface="Plus Jakarta Sans" pitchFamily="34" charset="0"/>
-                <a:ea typeface="Plus Jakarta Sans" pitchFamily="34" charset="-122"/>
-                <a:cs typeface="Plus Jakarta Sans" pitchFamily="34" charset="-120"/>
+                <a:latin typeface="Times New Roman" pitchFamily="34" charset="0"/>
+                <a:ea typeface="Times New Roman" pitchFamily="34" charset="-122"/>
+                <a:cs typeface="Times New Roman" pitchFamily="34" charset="-120"/>
               </a:rPr>
               <a:t>✓ 0% Booking Commission</a:t>
             </a:r>
@@ -10933,9 +10933,9 @@
                 <a:solidFill>
                   <a:srgbClr val="261E38"/>
                 </a:solidFill>
-                <a:latin typeface="Outfit" pitchFamily="34" charset="0"/>
-                <a:ea typeface="Outfit" pitchFamily="34" charset="-122"/>
-                <a:cs typeface="Outfit" pitchFamily="34" charset="-120"/>
+                <a:latin typeface="Times New Roman" pitchFamily="34" charset="0"/>
+                <a:ea typeface="Times New Roman" pitchFamily="34" charset="-122"/>
+                <a:cs typeface="Times New Roman" pitchFamily="34" charset="-120"/>
               </a:rPr>
               <a:t>Slot Scheduling Engine</a:t>
             </a:r>
@@ -11014,9 +11014,9 @@
                 <a:solidFill>
                   <a:srgbClr val="5F5377"/>
                 </a:solidFill>
-                <a:latin typeface="Plus Jakarta Sans" pitchFamily="34" charset="0"/>
-                <a:ea typeface="Plus Jakarta Sans" pitchFamily="34" charset="-122"/>
-                <a:cs typeface="Plus Jakarta Sans" pitchFamily="34" charset="-120"/>
+                <a:latin typeface="Times New Roman" pitchFamily="34" charset="0"/>
+                <a:ea typeface="Times New Roman" pitchFamily="34" charset="-122"/>
+                <a:cs typeface="Times New Roman" pitchFamily="34" charset="-120"/>
               </a:rPr>
               <a:t>Pet parents book physical or virtual consultations with real-time slot conflict prevention.</a:t>
             </a:r>
@@ -11101,9 +11101,9 @@
                 <a:solidFill>
                   <a:srgbClr val="261E38"/>
                 </a:solidFill>
-                <a:latin typeface="Plus Jakarta Sans" pitchFamily="34" charset="0"/>
-                <a:ea typeface="Plus Jakarta Sans" pitchFamily="34" charset="-122"/>
-                <a:cs typeface="Plus Jakarta Sans" pitchFamily="34" charset="-120"/>
+                <a:latin typeface="Times New Roman" pitchFamily="34" charset="0"/>
+                <a:ea typeface="Times New Roman" pitchFamily="34" charset="-122"/>
+                <a:cs typeface="Times New Roman" pitchFamily="34" charset="-120"/>
               </a:rPr>
               <a:t>✓ Vaccination &amp; Checkups</a:t>
             </a:r>
@@ -11165,9 +11165,9 @@
                 <a:solidFill>
                   <a:srgbClr val="261E38"/>
                 </a:solidFill>
-                <a:latin typeface="Plus Jakarta Sans" pitchFamily="34" charset="0"/>
-                <a:ea typeface="Plus Jakarta Sans" pitchFamily="34" charset="-122"/>
-                <a:cs typeface="Plus Jakarta Sans" pitchFamily="34" charset="-120"/>
+                <a:latin typeface="Times New Roman" pitchFamily="34" charset="0"/>
+                <a:ea typeface="Times New Roman" pitchFamily="34" charset="-122"/>
+                <a:cs typeface="Times New Roman" pitchFamily="34" charset="-120"/>
               </a:rPr>
               <a:t>✓ Emergency Trauma Booking</a:t>
             </a:r>
@@ -11229,9 +11229,9 @@
                 <a:solidFill>
                   <a:srgbClr val="261E38"/>
                 </a:solidFill>
-                <a:latin typeface="Plus Jakarta Sans" pitchFamily="34" charset="0"/>
-                <a:ea typeface="Plus Jakarta Sans" pitchFamily="34" charset="-122"/>
-                <a:cs typeface="Plus Jakarta Sans" pitchFamily="34" charset="-120"/>
+                <a:latin typeface="Times New Roman" pitchFamily="34" charset="0"/>
+                <a:ea typeface="Times New Roman" pitchFamily="34" charset="-122"/>
+                <a:cs typeface="Times New Roman" pitchFamily="34" charset="-120"/>
               </a:rPr>
               <a:t>✓ Adoption Meet &amp; Greets</a:t>
             </a:r>
@@ -11325,9 +11325,9 @@
                 <a:solidFill>
                   <a:srgbClr val="7C3AED"/>
                 </a:solidFill>
-                <a:latin typeface="Outfit" pitchFamily="34" charset="0"/>
-                <a:ea typeface="Outfit" pitchFamily="34" charset="-122"/>
-                <a:cs typeface="Outfit" pitchFamily="34" charset="-120"/>
+                <a:latin typeface="Times New Roman" pitchFamily="34" charset="0"/>
+                <a:ea typeface="Times New Roman" pitchFamily="34" charset="-122"/>
+                <a:cs typeface="Times New Roman" pitchFamily="34" charset="-120"/>
               </a:rPr>
               <a:t>🐾 Nuzzle Engine</a:t>
             </a:r>
@@ -11364,9 +11364,9 @@
                 <a:solidFill>
                   <a:srgbClr val="5F5377"/>
                 </a:solidFill>
-                <a:latin typeface="Plus Jakarta Sans" pitchFamily="34" charset="0"/>
-                <a:ea typeface="Plus Jakarta Sans" pitchFamily="34" charset="-122"/>
-                <a:cs typeface="Plus Jakarta Sans" pitchFamily="34" charset="-120"/>
+                <a:latin typeface="Times New Roman" pitchFamily="34" charset="0"/>
+                <a:ea typeface="Times New Roman" pitchFamily="34" charset="-122"/>
+                <a:cs typeface="Times New Roman" pitchFamily="34" charset="-120"/>
               </a:rPr>
               <a:t>Slide 7 / 10 • Full-Stack REST API Architecture</a:t>
             </a:r>
@@ -11403,9 +11403,9 @@
                 <a:solidFill>
                   <a:srgbClr val="7C3AED"/>
                 </a:solidFill>
-                <a:latin typeface="Plus Jakarta Sans" pitchFamily="34" charset="0"/>
-                <a:ea typeface="Plus Jakarta Sans" pitchFamily="34" charset="-122"/>
-                <a:cs typeface="Plus Jakarta Sans" pitchFamily="34" charset="-120"/>
+                <a:latin typeface="Times New Roman" pitchFamily="34" charset="0"/>
+                <a:ea typeface="Times New Roman" pitchFamily="34" charset="-122"/>
+                <a:cs typeface="Times New Roman" pitchFamily="34" charset="-120"/>
               </a:rPr>
               <a:t>COMMERCE &amp; ADOPTION HUBS</a:t>
             </a:r>
@@ -11442,9 +11442,9 @@
                 <a:solidFill>
                   <a:srgbClr val="261E38"/>
                 </a:solidFill>
-                <a:latin typeface="Outfit" pitchFamily="34" charset="0"/>
-                <a:ea typeface="Outfit" pitchFamily="34" charset="-122"/>
-                <a:cs typeface="Outfit" pitchFamily="34" charset="-120"/>
+                <a:latin typeface="Times New Roman" pitchFamily="34" charset="0"/>
+                <a:ea typeface="Times New Roman" pitchFamily="34" charset="-122"/>
+                <a:cs typeface="Times New Roman" pitchFamily="34" charset="-120"/>
               </a:rPr>
               <a:t>Verified Pet Boutique &amp; Adoption Listings API</a:t>
             </a:r>
@@ -11504,9 +11504,9 @@
                 <a:solidFill>
                   <a:srgbClr val="9589B0"/>
                 </a:solidFill>
-                <a:latin typeface="Plus Jakarta Sans" pitchFamily="34" charset="0"/>
-                <a:ea typeface="Plus Jakarta Sans" pitchFamily="34" charset="-122"/>
-                <a:cs typeface="Plus Jakarta Sans" pitchFamily="34" charset="-120"/>
+                <a:latin typeface="Times New Roman" pitchFamily="34" charset="0"/>
+                <a:ea typeface="Times New Roman" pitchFamily="34" charset="-122"/>
+                <a:cs typeface="Times New Roman" pitchFamily="34" charset="-120"/>
               </a:rPr>
               <a:t>Nuzzle API v2.0 • Abu Zafor, Nadim Rahman, Rizvi Sarker • Technopreneurship 2026</a:t>
             </a:r>
@@ -11568,9 +11568,9 @@
                 <a:solidFill>
                   <a:srgbClr val="7C3AED"/>
                 </a:solidFill>
-                <a:latin typeface="Plus Jakarta Sans" pitchFamily="34" charset="0"/>
-                <a:ea typeface="Plus Jakarta Sans" pitchFamily="34" charset="-122"/>
-                <a:cs typeface="Plus Jakarta Sans" pitchFamily="34" charset="-120"/>
+                <a:latin typeface="Times New Roman" pitchFamily="34" charset="0"/>
+                <a:ea typeface="Times New Roman" pitchFamily="34" charset="-122"/>
+                <a:cs typeface="Times New Roman" pitchFamily="34" charset="-120"/>
               </a:rPr>
               <a:t>🛍️ VERIFIED PET MARKETPLACE API</a:t>
             </a:r>
@@ -11632,9 +11632,9 @@
                 <a:solidFill>
                   <a:srgbClr val="261E38"/>
                 </a:solidFill>
-                <a:latin typeface="Outfit" pitchFamily="34" charset="0"/>
-                <a:ea typeface="Outfit" pitchFamily="34" charset="-122"/>
-                <a:cs typeface="Outfit" pitchFamily="34" charset="-120"/>
+                <a:latin typeface="Times New Roman" pitchFamily="34" charset="0"/>
+                <a:ea typeface="Times New Roman" pitchFamily="34" charset="-122"/>
+                <a:cs typeface="Times New Roman" pitchFamily="34" charset="-120"/>
               </a:rPr>
               <a:t>GET /api/marketplace</a:t>
             </a:r>
@@ -11674,9 +11674,9 @@
                 <a:solidFill>
                   <a:srgbClr val="5F5377"/>
                 </a:solidFill>
-                <a:latin typeface="Plus Jakarta Sans" pitchFamily="34" charset="0"/>
-                <a:ea typeface="Plus Jakarta Sans" pitchFamily="34" charset="-122"/>
-                <a:cs typeface="Plus Jakarta Sans" pitchFamily="34" charset="-120"/>
+                <a:latin typeface="Times New Roman" pitchFamily="34" charset="0"/>
+                <a:ea typeface="Times New Roman" pitchFamily="34" charset="-122"/>
+                <a:cs typeface="Times New Roman" pitchFamily="34" charset="-120"/>
               </a:rPr>
               <a:t>Filtered product catalog by Category (Food, Toys, Beds, Apparel, Health).</a:t>
             </a:r>
@@ -11738,9 +11738,9 @@
                 <a:solidFill>
                   <a:srgbClr val="261E38"/>
                 </a:solidFill>
-                <a:latin typeface="Outfit" pitchFamily="34" charset="0"/>
-                <a:ea typeface="Outfit" pitchFamily="34" charset="-122"/>
-                <a:cs typeface="Outfit" pitchFamily="34" charset="-120"/>
+                <a:latin typeface="Times New Roman" pitchFamily="34" charset="0"/>
+                <a:ea typeface="Times New Roman" pitchFamily="34" charset="-122"/>
+                <a:cs typeface="Times New Roman" pitchFamily="34" charset="-120"/>
               </a:rPr>
               <a:t>POST /api/marketplace</a:t>
             </a:r>
@@ -11780,9 +11780,9 @@
                 <a:solidFill>
                   <a:srgbClr val="5F5377"/>
                 </a:solidFill>
-                <a:latin typeface="Plus Jakarta Sans" pitchFamily="34" charset="0"/>
-                <a:ea typeface="Plus Jakarta Sans" pitchFamily="34" charset="-122"/>
-                <a:cs typeface="Plus Jakarta Sans" pitchFamily="34" charset="-120"/>
+                <a:latin typeface="Times New Roman" pitchFamily="34" charset="0"/>
+                <a:ea typeface="Times New Roman" pitchFamily="34" charset="-122"/>
+                <a:cs typeface="Times New Roman" pitchFamily="34" charset="-120"/>
               </a:rPr>
               <a:t>Verified merchants list authentic products with stock counts, pricing &amp; images.</a:t>
             </a:r>
@@ -11844,9 +11844,9 @@
                 <a:solidFill>
                   <a:srgbClr val="261E38"/>
                 </a:solidFill>
-                <a:latin typeface="Outfit" pitchFamily="34" charset="0"/>
-                <a:ea typeface="Outfit" pitchFamily="34" charset="-122"/>
-                <a:cs typeface="Outfit" pitchFamily="34" charset="-120"/>
+                <a:latin typeface="Times New Roman" pitchFamily="34" charset="0"/>
+                <a:ea typeface="Times New Roman" pitchFamily="34" charset="-122"/>
+                <a:cs typeface="Times New Roman" pitchFamily="34" charset="-120"/>
               </a:rPr>
               <a:t>Gold Shield Verification</a:t>
             </a:r>
@@ -11886,9 +11886,9 @@
                 <a:solidFill>
                   <a:srgbClr val="5F5377"/>
                 </a:solidFill>
-                <a:latin typeface="Plus Jakarta Sans" pitchFamily="34" charset="0"/>
-                <a:ea typeface="Plus Jakarta Sans" pitchFamily="34" charset="-122"/>
-                <a:cs typeface="Plus Jakarta Sans" pitchFamily="34" charset="-120"/>
+                <a:latin typeface="Times New Roman" pitchFamily="34" charset="0"/>
+                <a:ea typeface="Times New Roman" pitchFamily="34" charset="-122"/>
+                <a:cs typeface="Times New Roman" pitchFamily="34" charset="-120"/>
               </a:rPr>
               <a:t>Verified stores get official badge &amp; priority placement across marketplace feeds.</a:t>
             </a:r>
@@ -11950,9 +11950,9 @@
                 <a:solidFill>
                   <a:srgbClr val="0284C7"/>
                 </a:solidFill>
-                <a:latin typeface="Plus Jakarta Sans" pitchFamily="34" charset="0"/>
-                <a:ea typeface="Plus Jakarta Sans" pitchFamily="34" charset="-122"/>
-                <a:cs typeface="Plus Jakarta Sans" pitchFamily="34" charset="-120"/>
+                <a:latin typeface="Times New Roman" pitchFamily="34" charset="0"/>
+                <a:ea typeface="Times New Roman" pitchFamily="34" charset="-122"/>
+                <a:cs typeface="Times New Roman" pitchFamily="34" charset="-120"/>
               </a:rPr>
               <a:t>🏠 RESCUE &amp; ADOPTION NETWORK API</a:t>
             </a:r>
@@ -12014,9 +12014,9 @@
                 <a:solidFill>
                   <a:srgbClr val="261E38"/>
                 </a:solidFill>
-                <a:latin typeface="Outfit" pitchFamily="34" charset="0"/>
-                <a:ea typeface="Outfit" pitchFamily="34" charset="-122"/>
-                <a:cs typeface="Outfit" pitchFamily="34" charset="-120"/>
+                <a:latin typeface="Times New Roman" pitchFamily="34" charset="0"/>
+                <a:ea typeface="Times New Roman" pitchFamily="34" charset="-122"/>
+                <a:cs typeface="Times New Roman" pitchFamily="34" charset="-120"/>
               </a:rPr>
               <a:t>GET /api/adoption</a:t>
             </a:r>
@@ -12056,9 +12056,9 @@
                 <a:solidFill>
                   <a:srgbClr val="5F5377"/>
                 </a:solidFill>
-                <a:latin typeface="Plus Jakarta Sans" pitchFamily="34" charset="0"/>
-                <a:ea typeface="Plus Jakarta Sans" pitchFamily="34" charset="-122"/>
-                <a:cs typeface="Plus Jakarta Sans" pitchFamily="34" charset="-120"/>
+                <a:latin typeface="Times New Roman" pitchFamily="34" charset="0"/>
+                <a:ea typeface="Times New Roman" pitchFamily="34" charset="-122"/>
+                <a:cs typeface="Times New Roman" pitchFamily="34" charset="-120"/>
               </a:rPr>
               <a:t>Lists shelter &amp; rescue pets with age, breed, gender, and temperament tags.</a:t>
             </a:r>
@@ -12120,9 +12120,9 @@
                 <a:solidFill>
                   <a:srgbClr val="261E38"/>
                 </a:solidFill>
-                <a:latin typeface="Outfit" pitchFamily="34" charset="0"/>
-                <a:ea typeface="Outfit" pitchFamily="34" charset="-122"/>
-                <a:cs typeface="Outfit" pitchFamily="34" charset="-120"/>
+                <a:latin typeface="Times New Roman" pitchFamily="34" charset="0"/>
+                <a:ea typeface="Times New Roman" pitchFamily="34" charset="-122"/>
+                <a:cs typeface="Times New Roman" pitchFamily="34" charset="-120"/>
               </a:rPr>
               <a:t>Vaccination &amp; Neutered Badges</a:t>
             </a:r>
@@ -12162,9 +12162,9 @@
                 <a:solidFill>
                   <a:srgbClr val="5F5377"/>
                 </a:solidFill>
-                <a:latin typeface="Plus Jakarta Sans" pitchFamily="34" charset="0"/>
-                <a:ea typeface="Plus Jakarta Sans" pitchFamily="34" charset="-122"/>
-                <a:cs typeface="Plus Jakarta Sans" pitchFamily="34" charset="-120"/>
+                <a:latin typeface="Times New Roman" pitchFamily="34" charset="0"/>
+                <a:ea typeface="Times New Roman" pitchFamily="34" charset="-122"/>
+                <a:cs typeface="Times New Roman" pitchFamily="34" charset="-120"/>
               </a:rPr>
               <a:t>Each pet profile carries verified medical records and shelter background.</a:t>
             </a:r>
@@ -12226,9 +12226,9 @@
                 <a:solidFill>
                   <a:srgbClr val="261E38"/>
                 </a:solidFill>
-                <a:latin typeface="Outfit" pitchFamily="34" charset="0"/>
-                <a:ea typeface="Outfit" pitchFamily="34" charset="-122"/>
-                <a:cs typeface="Outfit" pitchFamily="34" charset="-120"/>
+                <a:latin typeface="Times New Roman" pitchFamily="34" charset="0"/>
+                <a:ea typeface="Times New Roman" pitchFamily="34" charset="-122"/>
+                <a:cs typeface="Times New Roman" pitchFamily="34" charset="-120"/>
               </a:rPr>
               <a:t>Meet &amp; Greet Scheduling</a:t>
             </a:r>
@@ -12268,9 +12268,9 @@
                 <a:solidFill>
                   <a:srgbClr val="5F5377"/>
                 </a:solidFill>
-                <a:latin typeface="Plus Jakarta Sans" pitchFamily="34" charset="0"/>
-                <a:ea typeface="Plus Jakarta Sans" pitchFamily="34" charset="-122"/>
-                <a:cs typeface="Plus Jakarta Sans" pitchFamily="34" charset="-120"/>
+                <a:latin typeface="Times New Roman" pitchFamily="34" charset="0"/>
+                <a:ea typeface="Times New Roman" pitchFamily="34" charset="-122"/>
+                <a:cs typeface="Times New Roman" pitchFamily="34" charset="-120"/>
               </a:rPr>
               <a:t>Direct adoption inquiry flow syncing with veterinary calendar slots.</a:t>
             </a:r>
@@ -12364,9 +12364,9 @@
                 <a:solidFill>
                   <a:srgbClr val="7C3AED"/>
                 </a:solidFill>
-                <a:latin typeface="Outfit" pitchFamily="34" charset="0"/>
-                <a:ea typeface="Outfit" pitchFamily="34" charset="-122"/>
-                <a:cs typeface="Outfit" pitchFamily="34" charset="-120"/>
+                <a:latin typeface="Times New Roman" pitchFamily="34" charset="0"/>
+                <a:ea typeface="Times New Roman" pitchFamily="34" charset="-122"/>
+                <a:cs typeface="Times New Roman" pitchFamily="34" charset="-120"/>
               </a:rPr>
               <a:t>🐾 Nuzzle Engine</a:t>
             </a:r>
@@ -12403,9 +12403,9 @@
                 <a:solidFill>
                   <a:srgbClr val="5F5377"/>
                 </a:solidFill>
-                <a:latin typeface="Plus Jakarta Sans" pitchFamily="34" charset="0"/>
-                <a:ea typeface="Plus Jakarta Sans" pitchFamily="34" charset="-122"/>
-                <a:cs typeface="Plus Jakarta Sans" pitchFamily="34" charset="-120"/>
+                <a:latin typeface="Times New Roman" pitchFamily="34" charset="0"/>
+                <a:ea typeface="Times New Roman" pitchFamily="34" charset="-122"/>
+                <a:cs typeface="Times New Roman" pitchFamily="34" charset="-120"/>
               </a:rPr>
               <a:t>Slide 8 / 10 • Full-Stack REST API Architecture</a:t>
             </a:r>
@@ -12442,9 +12442,9 @@
                 <a:solidFill>
                   <a:srgbClr val="7C3AED"/>
                 </a:solidFill>
-                <a:latin typeface="Plus Jakarta Sans" pitchFamily="34" charset="0"/>
-                <a:ea typeface="Plus Jakarta Sans" pitchFamily="34" charset="-122"/>
-                <a:cs typeface="Plus Jakarta Sans" pitchFamily="34" charset="-120"/>
+                <a:latin typeface="Times New Roman" pitchFamily="34" charset="0"/>
+                <a:ea typeface="Times New Roman" pitchFamily="34" charset="-122"/>
+                <a:cs typeface="Times New Roman" pitchFamily="34" charset="-120"/>
               </a:rPr>
               <a:t>AI INTELLIGENCE SUITE</a:t>
             </a:r>
@@ -12481,9 +12481,9 @@
                 <a:solidFill>
                   <a:srgbClr val="261E38"/>
                 </a:solidFill>
-                <a:latin typeface="Outfit" pitchFamily="34" charset="0"/>
-                <a:ea typeface="Outfit" pitchFamily="34" charset="-122"/>
-                <a:cs typeface="Outfit" pitchFamily="34" charset="-120"/>
+                <a:latin typeface="Times New Roman" pitchFamily="34" charset="0"/>
+                <a:ea typeface="Times New Roman" pitchFamily="34" charset="-122"/>
+                <a:cs typeface="Times New Roman" pitchFamily="34" charset="-120"/>
               </a:rPr>
               <a:t>PawDoctor 24/7 Symptom Triage Engine API</a:t>
             </a:r>
@@ -12543,9 +12543,9 @@
                 <a:solidFill>
                   <a:srgbClr val="9589B0"/>
                 </a:solidFill>
-                <a:latin typeface="Plus Jakarta Sans" pitchFamily="34" charset="0"/>
-                <a:ea typeface="Plus Jakarta Sans" pitchFamily="34" charset="-122"/>
-                <a:cs typeface="Plus Jakarta Sans" pitchFamily="34" charset="-120"/>
+                <a:latin typeface="Times New Roman" pitchFamily="34" charset="0"/>
+                <a:ea typeface="Times New Roman" pitchFamily="34" charset="-122"/>
+                <a:cs typeface="Times New Roman" pitchFamily="34" charset="-120"/>
               </a:rPr>
               <a:t>Nuzzle API v2.0 • Abu Zafor, Nadim Rahman, Rizvi Sarker • Technopreneurship 2026</a:t>
             </a:r>
@@ -12607,9 +12607,9 @@
                 <a:solidFill>
                   <a:srgbClr val="7C3AED"/>
                 </a:solidFill>
-                <a:latin typeface="Plus Jakarta Sans" pitchFamily="34" charset="0"/>
-                <a:ea typeface="Plus Jakarta Sans" pitchFamily="34" charset="-122"/>
-                <a:cs typeface="Plus Jakarta Sans" pitchFamily="34" charset="-120"/>
+                <a:latin typeface="Times New Roman" pitchFamily="34" charset="0"/>
+                <a:ea typeface="Times New Roman" pitchFamily="34" charset="-122"/>
+                <a:cs typeface="Times New Roman" pitchFamily="34" charset="-120"/>
               </a:rPr>
               <a:t>CLINICAL TRIAGE CLASSIFICATION</a:t>
             </a:r>
@@ -12671,9 +12671,9 @@
                 <a:solidFill>
                   <a:srgbClr val="F43F5E"/>
                 </a:solidFill>
-                <a:latin typeface="Outfit" pitchFamily="34" charset="0"/>
-                <a:ea typeface="Outfit" pitchFamily="34" charset="-122"/>
-                <a:cs typeface="Outfit" pitchFamily="34" charset="-120"/>
+                <a:latin typeface="Times New Roman" pitchFamily="34" charset="0"/>
+                <a:ea typeface="Times New Roman" pitchFamily="34" charset="-122"/>
+                <a:cs typeface="Times New Roman" pitchFamily="34" charset="-120"/>
               </a:rPr>
               <a:t>🚨 EMERGENCY (Critical)</a:t>
             </a:r>
@@ -12713,9 +12713,9 @@
                 <a:solidFill>
                   <a:srgbClr val="5F5377"/>
                 </a:solidFill>
-                <a:latin typeface="Plus Jakarta Sans" pitchFamily="34" charset="0"/>
-                <a:ea typeface="Plus Jakarta Sans" pitchFamily="34" charset="-122"/>
-                <a:cs typeface="Plus Jakarta Sans" pitchFamily="34" charset="-120"/>
+                <a:latin typeface="Times New Roman" pitchFamily="34" charset="0"/>
+                <a:ea typeface="Times New Roman" pitchFamily="34" charset="-122"/>
+                <a:cs typeface="Times New Roman" pitchFamily="34" charset="-120"/>
               </a:rPr>
               <a:t>Toxins (chocolate, poison, grapes), uncontrolled bleeding, trauma. Triggers immediate 24/7 emergency clinic dispatch.</a:t>
             </a:r>
@@ -12777,9 +12777,9 @@
                 <a:solidFill>
                   <a:srgbClr val="F59E0B"/>
                 </a:solidFill>
-                <a:latin typeface="Outfit" pitchFamily="34" charset="0"/>
-                <a:ea typeface="Outfit" pitchFamily="34" charset="-122"/>
-                <a:cs typeface="Outfit" pitchFamily="34" charset="-120"/>
+                <a:latin typeface="Times New Roman" pitchFamily="34" charset="0"/>
+                <a:ea typeface="Times New Roman" pitchFamily="34" charset="-122"/>
+                <a:cs typeface="Times New Roman" pitchFamily="34" charset="-120"/>
               </a:rPr>
               <a:t>⚠️ MODERATE (Clinical Attention)</a:t>
             </a:r>
@@ -12819,9 +12819,9 @@
                 <a:solidFill>
                   <a:srgbClr val="5F5377"/>
                 </a:solidFill>
-                <a:latin typeface="Plus Jakarta Sans" pitchFamily="34" charset="0"/>
-                <a:ea typeface="Plus Jakarta Sans" pitchFamily="34" charset="-122"/>
-                <a:cs typeface="Plus Jakarta Sans" pitchFamily="34" charset="-120"/>
+                <a:latin typeface="Times New Roman" pitchFamily="34" charset="0"/>
+                <a:ea typeface="Times New Roman" pitchFamily="34" charset="-122"/>
+                <a:cs typeface="Times New Roman" pitchFamily="34" charset="-120"/>
               </a:rPr>
               <a:t>Limping, repeated vomiting, diarrhea, lethargy. Suggests withholding food for 4h and booking quick checkup.</a:t>
             </a:r>
@@ -12883,9 +12883,9 @@
                 <a:solidFill>
                   <a:srgbClr val="10B981"/>
                 </a:solidFill>
-                <a:latin typeface="Outfit" pitchFamily="34" charset="0"/>
-                <a:ea typeface="Outfit" pitchFamily="34" charset="-122"/>
-                <a:cs typeface="Outfit" pitchFamily="34" charset="-120"/>
+                <a:latin typeface="Times New Roman" pitchFamily="34" charset="0"/>
+                <a:ea typeface="Times New Roman" pitchFamily="34" charset="-122"/>
+                <a:cs typeface="Times New Roman" pitchFamily="34" charset="-120"/>
               </a:rPr>
               <a:t>🌿 LOW / WELLNESS (Guidance)</a:t>
             </a:r>
@@ -12925,9 +12925,9 @@
                 <a:solidFill>
                   <a:srgbClr val="5F5377"/>
                 </a:solidFill>
-                <a:latin typeface="Plus Jakarta Sans" pitchFamily="34" charset="0"/>
-                <a:ea typeface="Plus Jakarta Sans" pitchFamily="34" charset="-122"/>
-                <a:cs typeface="Plus Jakarta Sans" pitchFamily="34" charset="-120"/>
+                <a:latin typeface="Times New Roman" pitchFamily="34" charset="0"/>
+                <a:ea typeface="Times New Roman" pitchFamily="34" charset="-122"/>
+                <a:cs typeface="Times New Roman" pitchFamily="34" charset="-120"/>
               </a:rPr>
               <a:t>Nutrition, dietary caloric calculation, coat health, preventive care tips in Bangla &amp; English.</a:t>
             </a:r>
@@ -13516,9 +13516,9 @@
                 <a:solidFill>
                   <a:srgbClr val="7C3AED"/>
                 </a:solidFill>
-                <a:latin typeface="Outfit" pitchFamily="34" charset="0"/>
-                <a:ea typeface="Outfit" pitchFamily="34" charset="-122"/>
-                <a:cs typeface="Outfit" pitchFamily="34" charset="-120"/>
+                <a:latin typeface="Times New Roman" pitchFamily="34" charset="0"/>
+                <a:ea typeface="Times New Roman" pitchFamily="34" charset="-122"/>
+                <a:cs typeface="Times New Roman" pitchFamily="34" charset="-120"/>
               </a:rPr>
               <a:t>🐾 Nuzzle Engine</a:t>
             </a:r>
@@ -13555,9 +13555,9 @@
                 <a:solidFill>
                   <a:srgbClr val="5F5377"/>
                 </a:solidFill>
-                <a:latin typeface="Plus Jakarta Sans" pitchFamily="34" charset="0"/>
-                <a:ea typeface="Plus Jakarta Sans" pitchFamily="34" charset="-122"/>
-                <a:cs typeface="Plus Jakarta Sans" pitchFamily="34" charset="-120"/>
+                <a:latin typeface="Times New Roman" pitchFamily="34" charset="0"/>
+                <a:ea typeface="Times New Roman" pitchFamily="34" charset="-122"/>
+                <a:cs typeface="Times New Roman" pitchFamily="34" charset="-120"/>
               </a:rPr>
               <a:t>Slide 9 / 10 • Full-Stack REST API Architecture</a:t>
             </a:r>
@@ -13594,9 +13594,9 @@
                 <a:solidFill>
                   <a:srgbClr val="7C3AED"/>
                 </a:solidFill>
-                <a:latin typeface="Plus Jakarta Sans" pitchFamily="34" charset="0"/>
-                <a:ea typeface="Plus Jakarta Sans" pitchFamily="34" charset="-122"/>
-                <a:cs typeface="Plus Jakarta Sans" pitchFamily="34" charset="-120"/>
+                <a:latin typeface="Times New Roman" pitchFamily="34" charset="0"/>
+                <a:ea typeface="Times New Roman" pitchFamily="34" charset="-122"/>
+                <a:cs typeface="Times New Roman" pitchFamily="34" charset="-120"/>
               </a:rPr>
               <a:t>CLIENT INTEGRATION LAYER</a:t>
             </a:r>
@@ -13633,9 +13633,9 @@
                 <a:solidFill>
                   <a:srgbClr val="261E38"/>
                 </a:solidFill>
-                <a:latin typeface="Outfit" pitchFamily="34" charset="0"/>
-                <a:ea typeface="Outfit" pitchFamily="34" charset="-122"/>
-                <a:cs typeface="Outfit" pitchFamily="34" charset="-120"/>
+                <a:latin typeface="Times New Roman" pitchFamily="34" charset="0"/>
+                <a:ea typeface="Times New Roman" pitchFamily="34" charset="-122"/>
+                <a:cs typeface="Times New Roman" pitchFamily="34" charset="-120"/>
               </a:rPr>
               <a:t>Frontend Service Architecture &amp; Reactive State Synchronization</a:t>
             </a:r>
@@ -13695,9 +13695,9 @@
                 <a:solidFill>
                   <a:srgbClr val="9589B0"/>
                 </a:solidFill>
-                <a:latin typeface="Plus Jakarta Sans" pitchFamily="34" charset="0"/>
-                <a:ea typeface="Plus Jakarta Sans" pitchFamily="34" charset="-122"/>
-                <a:cs typeface="Plus Jakarta Sans" pitchFamily="34" charset="-120"/>
+                <a:latin typeface="Times New Roman" pitchFamily="34" charset="0"/>
+                <a:ea typeface="Times New Roman" pitchFamily="34" charset="-122"/>
+                <a:cs typeface="Times New Roman" pitchFamily="34" charset="-120"/>
               </a:rPr>
               <a:t>Nuzzle API v2.0 • Abu Zafor, Nadim Rahman, Rizvi Sarker • Technopreneurship 2026</a:t>
             </a:r>
@@ -13759,9 +13759,9 @@
                 <a:solidFill>
                   <a:srgbClr val="7C3AED"/>
                 </a:solidFill>
-                <a:latin typeface="Outfit" pitchFamily="34" charset="0"/>
-                <a:ea typeface="Outfit" pitchFamily="34" charset="-122"/>
-                <a:cs typeface="Outfit" pitchFamily="34" charset="-120"/>
+                <a:latin typeface="Times New Roman" pitchFamily="34" charset="0"/>
+                <a:ea typeface="Times New Roman" pitchFamily="34" charset="-122"/>
+                <a:cs typeface="Times New Roman" pitchFamily="34" charset="-120"/>
               </a:rPr>
               <a:t>apiClient.ts (Core HTTP Client)</a:t>
             </a:r>
@@ -13801,9 +13801,9 @@
                 <a:solidFill>
                   <a:srgbClr val="5F5377"/>
                 </a:solidFill>
-                <a:latin typeface="Plus Jakarta Sans" pitchFamily="34" charset="0"/>
-                <a:ea typeface="Plus Jakarta Sans" pitchFamily="34" charset="-122"/>
-                <a:cs typeface="Plus Jakarta Sans" pitchFamily="34" charset="-120"/>
+                <a:latin typeface="Times New Roman" pitchFamily="34" charset="0"/>
+                <a:ea typeface="Times New Roman" pitchFamily="34" charset="-122"/>
+                <a:cs typeface="Times New Roman" pitchFamily="34" charset="-120"/>
               </a:rPr>
               <a:t>Base fetch client supporting Bearer token headers, standard JSON unwrapping, timeout guards, and Vite proxy.</a:t>
             </a:r>
@@ -13972,9 +13972,9 @@
                 <a:solidFill>
                   <a:srgbClr val="7C3AED"/>
                 </a:solidFill>
-                <a:latin typeface="Outfit" pitchFamily="34" charset="0"/>
-                <a:ea typeface="Outfit" pitchFamily="34" charset="-122"/>
-                <a:cs typeface="Outfit" pitchFamily="34" charset="-120"/>
+                <a:latin typeface="Times New Roman" pitchFamily="34" charset="0"/>
+                <a:ea typeface="Times New Roman" pitchFamily="34" charset="-122"/>
+                <a:cs typeface="Times New Roman" pitchFamily="34" charset="-120"/>
               </a:rPr>
               <a:t>Domain Service Modules</a:t>
             </a:r>
@@ -14014,9 +14014,9 @@
                 <a:solidFill>
                   <a:srgbClr val="5F5377"/>
                 </a:solidFill>
-                <a:latin typeface="Plus Jakarta Sans" pitchFamily="34" charset="0"/>
-                <a:ea typeface="Plus Jakarta Sans" pitchFamily="34" charset="-122"/>
-                <a:cs typeface="Plus Jakarta Sans" pitchFamily="34" charset="-120"/>
+                <a:latin typeface="Times New Roman" pitchFamily="34" charset="0"/>
+                <a:ea typeface="Times New Roman" pitchFamily="34" charset="-122"/>
+                <a:cs typeface="Times New Roman" pitchFamily="34" charset="-120"/>
               </a:rPr>
               <a:t>Modular services encapsulating each business domain: authService, postService, petService, vetService, pawAiService.</a:t>
             </a:r>
@@ -14185,9 +14185,9 @@
                 <a:solidFill>
                   <a:srgbClr val="7C3AED"/>
                 </a:solidFill>
-                <a:latin typeface="Outfit" pitchFamily="34" charset="0"/>
-                <a:ea typeface="Outfit" pitchFamily="34" charset="-122"/>
-                <a:cs typeface="Outfit" pitchFamily="34" charset="-120"/>
+                <a:latin typeface="Times New Roman" pitchFamily="34" charset="0"/>
+                <a:ea typeface="Times New Roman" pitchFamily="34" charset="-122"/>
+                <a:cs typeface="Times New Roman" pitchFamily="34" charset="-120"/>
               </a:rPr>
               <a:t>appStore.ts Reactive Sync</a:t>
             </a:r>
@@ -14227,9 +14227,9 @@
                 <a:solidFill>
                   <a:srgbClr val="5F5377"/>
                 </a:solidFill>
-                <a:latin typeface="Plus Jakarta Sans" pitchFamily="34" charset="0"/>
-                <a:ea typeface="Plus Jakarta Sans" pitchFamily="34" charset="-122"/>
-                <a:cs typeface="Plus Jakarta Sans" pitchFamily="34" charset="-120"/>
+                <a:latin typeface="Times New Roman" pitchFamily="34" charset="0"/>
+                <a:ea typeface="Times New Roman" pitchFamily="34" charset="-122"/>
+                <a:cs typeface="Times New Roman" pitchFamily="34" charset="-120"/>
               </a:rPr>
               <a:t>Vue reactive store performs optimistic mutations immediately for zero-lag UI, then asynchronously syncs to backend API.</a:t>
             </a:r>
@@ -14378,9 +14378,9 @@
                 <a:solidFill>
                   <a:srgbClr val="7C3AED"/>
                 </a:solidFill>
-                <a:latin typeface="Outfit" pitchFamily="34" charset="0"/>
-                <a:ea typeface="Outfit" pitchFamily="34" charset="-122"/>
-                <a:cs typeface="Outfit" pitchFamily="34" charset="-120"/>
+                <a:latin typeface="Times New Roman" pitchFamily="34" charset="0"/>
+                <a:ea typeface="Times New Roman" pitchFamily="34" charset="-122"/>
+                <a:cs typeface="Times New Roman" pitchFamily="34" charset="-120"/>
               </a:rPr>
               <a:t>Vite Dev Proxy Configuration</a:t>
             </a:r>
@@ -14420,9 +14420,9 @@
                 <a:solidFill>
                   <a:srgbClr val="5F5377"/>
                 </a:solidFill>
-                <a:latin typeface="Plus Jakarta Sans" pitchFamily="34" charset="0"/>
-                <a:ea typeface="Plus Jakarta Sans" pitchFamily="34" charset="-122"/>
-                <a:cs typeface="Plus Jakarta Sans" pitchFamily="34" charset="-120"/>
+                <a:latin typeface="Times New Roman" pitchFamily="34" charset="0"/>
+                <a:ea typeface="Times New Roman" pitchFamily="34" charset="-122"/>
+                <a:cs typeface="Times New Roman" pitchFamily="34" charset="-120"/>
               </a:rPr>
               <a:t>vite.config.ts automatically proxies all /api requests to http://localhost:3000 for seamless local development with 0 CORS.</a:t>
             </a:r>
